--- a/docs/pptx/auc3/ritu-auc3-linsubhr-sens-sideeffect.pptx
+++ b/docs/pptx/auc3/ritu-auc3-linsubhr-sens-sideeffect.pptx
@@ -2443,7 +2443,7 @@
           </p:nvSpPr>
           <p:spPr>
             <a:xfrm>
-              <a:off x="1972656" y="2073503"/>
+              <a:off x="1971769" y="2073503"/>
               <a:ext cx="0" cy="3649639"/>
             </a:xfrm>
             <a:custGeom>
@@ -2486,7 +2486,7 @@
           </p:nvSpPr>
           <p:spPr>
             <a:xfrm>
-              <a:off x="4071747" y="2073503"/>
+              <a:off x="4066896" y="2073503"/>
               <a:ext cx="0" cy="3649639"/>
             </a:xfrm>
             <a:custGeom>
@@ -2529,7 +2529,7 @@
           </p:nvSpPr>
           <p:spPr>
             <a:xfrm>
-              <a:off x="6170837" y="2073503"/>
+              <a:off x="6162023" y="2073503"/>
               <a:ext cx="0" cy="3649639"/>
             </a:xfrm>
             <a:custGeom>
@@ -2572,7 +2572,7 @@
           </p:nvSpPr>
           <p:spPr>
             <a:xfrm>
-              <a:off x="8269927" y="2073503"/>
+              <a:off x="8257149" y="2073503"/>
               <a:ext cx="0" cy="3649639"/>
             </a:xfrm>
             <a:custGeom>
@@ -2830,7 +2830,7 @@
           </p:nvSpPr>
           <p:spPr>
             <a:xfrm>
-              <a:off x="923111" y="2073503"/>
+              <a:off x="924206" y="2073503"/>
               <a:ext cx="0" cy="3649639"/>
             </a:xfrm>
             <a:custGeom>
@@ -2873,7 +2873,7 @@
           </p:nvSpPr>
           <p:spPr>
             <a:xfrm>
-              <a:off x="3022201" y="2073503"/>
+              <a:off x="3019333" y="2073503"/>
               <a:ext cx="0" cy="3649639"/>
             </a:xfrm>
             <a:custGeom>
@@ -2916,7 +2916,7 @@
           </p:nvSpPr>
           <p:spPr>
             <a:xfrm>
-              <a:off x="5121292" y="2073503"/>
+              <a:off x="5114459" y="2073503"/>
               <a:ext cx="0" cy="3649639"/>
             </a:xfrm>
             <a:custGeom>
@@ -2959,7 +2959,7 @@
           </p:nvSpPr>
           <p:spPr>
             <a:xfrm>
-              <a:off x="7220382" y="2073503"/>
+              <a:off x="7209586" y="2073503"/>
               <a:ext cx="0" cy="3649639"/>
             </a:xfrm>
             <a:custGeom>
@@ -3003,521 +3003,521 @@
           <p:spPr>
             <a:xfrm>
               <a:off x="1172049" y="2073503"/>
-              <a:ext cx="7090630" cy="3392566"/>
+              <a:ext cx="7090630" cy="3392429"/>
             </a:xfrm>
             <a:custGeom>
               <a:avLst/>
               <a:pathLst>
-                <a:path w="7090630" h="3392566">
+                <a:path w="7090630" h="3392429">
                   <a:moveTo>
-                    <a:pt x="720616" y="0"/>
+                    <a:pt x="755170" y="0"/>
                   </a:moveTo>
                   <a:lnTo>
-                    <a:pt x="787847" y="131564"/>
-                  </a:lnTo>
-                  <a:lnTo>
-                    <a:pt x="859470" y="266097"/>
-                  </a:lnTo>
-                  <a:lnTo>
-                    <a:pt x="931092" y="395231"/>
-                  </a:lnTo>
-                  <a:lnTo>
-                    <a:pt x="1002715" y="519183"/>
-                  </a:lnTo>
-                  <a:lnTo>
-                    <a:pt x="1074337" y="638159"/>
-                  </a:lnTo>
-                  <a:lnTo>
-                    <a:pt x="1145960" y="752361"/>
-                  </a:lnTo>
-                  <a:lnTo>
-                    <a:pt x="1217582" y="861980"/>
-                  </a:lnTo>
-                  <a:lnTo>
-                    <a:pt x="1289205" y="967199"/>
-                  </a:lnTo>
-                  <a:lnTo>
-                    <a:pt x="1360827" y="1068196"/>
-                  </a:lnTo>
-                  <a:lnTo>
-                    <a:pt x="1432450" y="1165139"/>
-                  </a:lnTo>
-                  <a:lnTo>
-                    <a:pt x="1504073" y="1258192"/>
-                  </a:lnTo>
-                  <a:lnTo>
-                    <a:pt x="1575695" y="1347510"/>
-                  </a:lnTo>
-                  <a:lnTo>
-                    <a:pt x="1647318" y="1433244"/>
-                  </a:lnTo>
-                  <a:lnTo>
-                    <a:pt x="1718940" y="1515537"/>
-                  </a:lnTo>
-                  <a:lnTo>
-                    <a:pt x="1790563" y="1594527"/>
-                  </a:lnTo>
-                  <a:lnTo>
-                    <a:pt x="1862185" y="1670347"/>
-                  </a:lnTo>
-                  <a:lnTo>
-                    <a:pt x="1933808" y="1743124"/>
-                  </a:lnTo>
-                  <a:lnTo>
-                    <a:pt x="2005430" y="1812980"/>
-                  </a:lnTo>
-                  <a:lnTo>
-                    <a:pt x="2077053" y="1880033"/>
-                  </a:lnTo>
-                  <a:lnTo>
-                    <a:pt x="2148675" y="1944395"/>
-                  </a:lnTo>
-                  <a:lnTo>
-                    <a:pt x="2220298" y="2006174"/>
-                  </a:lnTo>
-                  <a:lnTo>
-                    <a:pt x="2291920" y="2065473"/>
-                  </a:lnTo>
-                  <a:lnTo>
-                    <a:pt x="2363543" y="2122393"/>
-                  </a:lnTo>
-                  <a:lnTo>
-                    <a:pt x="2435165" y="2177028"/>
-                  </a:lnTo>
-                  <a:lnTo>
-                    <a:pt x="2506788" y="2229471"/>
-                  </a:lnTo>
-                  <a:lnTo>
-                    <a:pt x="2578410" y="2279809"/>
-                  </a:lnTo>
-                  <a:lnTo>
-                    <a:pt x="2650033" y="2328126"/>
-                  </a:lnTo>
-                  <a:lnTo>
-                    <a:pt x="2721655" y="2374505"/>
-                  </a:lnTo>
-                  <a:lnTo>
-                    <a:pt x="2793278" y="2419022"/>
-                  </a:lnTo>
-                  <a:lnTo>
-                    <a:pt x="2864901" y="2461752"/>
-                  </a:lnTo>
-                  <a:lnTo>
-                    <a:pt x="2936523" y="2502768"/>
-                  </a:lnTo>
-                  <a:lnTo>
-                    <a:pt x="3008146" y="2542138"/>
-                  </a:lnTo>
-                  <a:lnTo>
-                    <a:pt x="3079768" y="2579927"/>
-                  </a:lnTo>
-                  <a:lnTo>
-                    <a:pt x="3151391" y="2616200"/>
-                  </a:lnTo>
-                  <a:lnTo>
-                    <a:pt x="3223013" y="2651018"/>
-                  </a:lnTo>
-                  <a:lnTo>
-                    <a:pt x="3294636" y="2620106"/>
-                  </a:lnTo>
-                  <a:lnTo>
-                    <a:pt x="3366258" y="2580660"/>
-                  </a:lnTo>
-                  <a:lnTo>
-                    <a:pt x="3437881" y="2539412"/>
-                  </a:lnTo>
-                  <a:lnTo>
-                    <a:pt x="3509503" y="2496280"/>
-                  </a:lnTo>
-                  <a:lnTo>
-                    <a:pt x="3581126" y="2451179"/>
-                  </a:lnTo>
-                  <a:lnTo>
-                    <a:pt x="3652748" y="2404017"/>
-                  </a:lnTo>
-                  <a:lnTo>
-                    <a:pt x="3724371" y="2354702"/>
-                  </a:lnTo>
-                  <a:lnTo>
-                    <a:pt x="3795993" y="2303134"/>
-                  </a:lnTo>
-                  <a:lnTo>
-                    <a:pt x="3867616" y="2249210"/>
-                  </a:lnTo>
-                  <a:lnTo>
-                    <a:pt x="3939238" y="2192824"/>
-                  </a:lnTo>
-                  <a:lnTo>
-                    <a:pt x="4010861" y="2133862"/>
-                  </a:lnTo>
-                  <a:lnTo>
-                    <a:pt x="4082483" y="2072208"/>
-                  </a:lnTo>
-                  <a:lnTo>
-                    <a:pt x="4154106" y="2007737"/>
-                  </a:lnTo>
-                  <a:lnTo>
-                    <a:pt x="4225729" y="1940322"/>
-                  </a:lnTo>
-                  <a:lnTo>
-                    <a:pt x="4297351" y="1869827"/>
-                  </a:lnTo>
-                  <a:lnTo>
-                    <a:pt x="4368974" y="1796113"/>
-                  </a:lnTo>
-                  <a:lnTo>
-                    <a:pt x="4440596" y="1719032"/>
-                  </a:lnTo>
-                  <a:lnTo>
-                    <a:pt x="4512219" y="1638430"/>
-                  </a:lnTo>
-                  <a:lnTo>
-                    <a:pt x="4583841" y="1554147"/>
-                  </a:lnTo>
-                  <a:lnTo>
-                    <a:pt x="4655464" y="1466014"/>
-                  </a:lnTo>
-                  <a:lnTo>
-                    <a:pt x="4727086" y="1373856"/>
-                  </a:lnTo>
-                  <a:lnTo>
-                    <a:pt x="4798709" y="1277489"/>
-                  </a:lnTo>
-                  <a:lnTo>
-                    <a:pt x="4870331" y="1176720"/>
-                  </a:lnTo>
-                  <a:lnTo>
-                    <a:pt x="4941954" y="1071349"/>
-                  </a:lnTo>
-                  <a:lnTo>
-                    <a:pt x="5013576" y="961165"/>
-                  </a:lnTo>
-                  <a:lnTo>
-                    <a:pt x="5085199" y="845949"/>
-                  </a:lnTo>
-                  <a:lnTo>
-                    <a:pt x="5156821" y="725470"/>
-                  </a:lnTo>
-                  <a:lnTo>
-                    <a:pt x="5228444" y="599488"/>
-                  </a:lnTo>
-                  <a:lnTo>
-                    <a:pt x="5300066" y="467752"/>
-                  </a:lnTo>
-                  <a:lnTo>
-                    <a:pt x="5371689" y="330000"/>
-                  </a:lnTo>
-                  <a:lnTo>
-                    <a:pt x="5443311" y="185955"/>
-                  </a:lnTo>
-                  <a:lnTo>
-                    <a:pt x="5514934" y="35332"/>
-                  </a:lnTo>
-                  <a:lnTo>
-                    <a:pt x="5531001" y="0"/>
+                    <a:pt x="787847" y="65537"/>
+                  </a:lnTo>
+                  <a:lnTo>
+                    <a:pt x="859470" y="203391"/>
+                  </a:lnTo>
+                  <a:lnTo>
+                    <a:pt x="931092" y="335685"/>
+                  </a:lnTo>
+                  <a:lnTo>
+                    <a:pt x="1002715" y="462645"/>
+                  </a:lnTo>
+                  <a:lnTo>
+                    <a:pt x="1074337" y="584484"/>
+                  </a:lnTo>
+                  <a:lnTo>
+                    <a:pt x="1145960" y="701409"/>
+                  </a:lnTo>
+                  <a:lnTo>
+                    <a:pt x="1217582" y="813619"/>
+                  </a:lnTo>
+                  <a:lnTo>
+                    <a:pt x="1289205" y="921303"/>
+                  </a:lnTo>
+                  <a:lnTo>
+                    <a:pt x="1360827" y="1024645"/>
+                  </a:lnTo>
+                  <a:lnTo>
+                    <a:pt x="1432450" y="1123819"/>
+                  </a:lnTo>
+                  <a:lnTo>
+                    <a:pt x="1504073" y="1218993"/>
+                  </a:lnTo>
+                  <a:lnTo>
+                    <a:pt x="1575695" y="1310329"/>
+                  </a:lnTo>
+                  <a:lnTo>
+                    <a:pt x="1647318" y="1397981"/>
+                  </a:lnTo>
+                  <a:lnTo>
+                    <a:pt x="1718940" y="1482099"/>
+                  </a:lnTo>
+                  <a:lnTo>
+                    <a:pt x="1790563" y="1562824"/>
+                  </a:lnTo>
+                  <a:lnTo>
+                    <a:pt x="1862185" y="1640293"/>
+                  </a:lnTo>
+                  <a:lnTo>
+                    <a:pt x="1933808" y="1714638"/>
+                  </a:lnTo>
+                  <a:lnTo>
+                    <a:pt x="2005430" y="1785985"/>
+                  </a:lnTo>
+                  <a:lnTo>
+                    <a:pt x="2077053" y="1854455"/>
+                  </a:lnTo>
+                  <a:lnTo>
+                    <a:pt x="2148675" y="1920163"/>
+                  </a:lnTo>
+                  <a:lnTo>
+                    <a:pt x="2220298" y="1983221"/>
+                  </a:lnTo>
+                  <a:lnTo>
+                    <a:pt x="2291920" y="2043737"/>
+                  </a:lnTo>
+                  <a:lnTo>
+                    <a:pt x="2363543" y="2101811"/>
+                  </a:lnTo>
+                  <a:lnTo>
+                    <a:pt x="2435165" y="2157544"/>
+                  </a:lnTo>
+                  <a:lnTo>
+                    <a:pt x="2506788" y="2211028"/>
+                  </a:lnTo>
+                  <a:lnTo>
+                    <a:pt x="2578410" y="2262356"/>
+                  </a:lnTo>
+                  <a:lnTo>
+                    <a:pt x="2650033" y="2311614"/>
+                  </a:lnTo>
+                  <a:lnTo>
+                    <a:pt x="2721655" y="2358885"/>
+                  </a:lnTo>
+                  <a:lnTo>
+                    <a:pt x="2793278" y="2404250"/>
+                  </a:lnTo>
+                  <a:lnTo>
+                    <a:pt x="2864901" y="2447786"/>
+                  </a:lnTo>
+                  <a:lnTo>
+                    <a:pt x="2936523" y="2489565"/>
+                  </a:lnTo>
+                  <a:lnTo>
+                    <a:pt x="3008146" y="2529660"/>
+                  </a:lnTo>
+                  <a:lnTo>
+                    <a:pt x="3079768" y="2568138"/>
+                  </a:lnTo>
+                  <a:lnTo>
+                    <a:pt x="3151391" y="2605063"/>
+                  </a:lnTo>
+                  <a:lnTo>
+                    <a:pt x="3223013" y="2640500"/>
+                  </a:lnTo>
+                  <a:lnTo>
+                    <a:pt x="3294636" y="2631916"/>
+                  </a:lnTo>
+                  <a:lnTo>
+                    <a:pt x="3366258" y="2593267"/>
+                  </a:lnTo>
+                  <a:lnTo>
+                    <a:pt x="3437881" y="2552865"/>
+                  </a:lnTo>
+                  <a:lnTo>
+                    <a:pt x="3509503" y="2510630"/>
+                  </a:lnTo>
+                  <a:lnTo>
+                    <a:pt x="3581126" y="2466478"/>
+                  </a:lnTo>
+                  <a:lnTo>
+                    <a:pt x="3652748" y="2420323"/>
+                  </a:lnTo>
+                  <a:lnTo>
+                    <a:pt x="3724371" y="2372074"/>
+                  </a:lnTo>
+                  <a:lnTo>
+                    <a:pt x="3795993" y="2321636"/>
+                  </a:lnTo>
+                  <a:lnTo>
+                    <a:pt x="3867616" y="2268909"/>
+                  </a:lnTo>
+                  <a:lnTo>
+                    <a:pt x="3939238" y="2213791"/>
+                  </a:lnTo>
+                  <a:lnTo>
+                    <a:pt x="4010861" y="2156171"/>
+                  </a:lnTo>
+                  <a:lnTo>
+                    <a:pt x="4082483" y="2095937"/>
+                  </a:lnTo>
+                  <a:lnTo>
+                    <a:pt x="4154106" y="2032970"/>
+                  </a:lnTo>
+                  <a:lnTo>
+                    <a:pt x="4225729" y="1967147"/>
+                  </a:lnTo>
+                  <a:lnTo>
+                    <a:pt x="4297351" y="1898336"/>
+                  </a:lnTo>
+                  <a:lnTo>
+                    <a:pt x="4368974" y="1826404"/>
+                  </a:lnTo>
+                  <a:lnTo>
+                    <a:pt x="4440596" y="1751208"/>
+                  </a:lnTo>
+                  <a:lnTo>
+                    <a:pt x="4512219" y="1672601"/>
+                  </a:lnTo>
+                  <a:lnTo>
+                    <a:pt x="4583841" y="1590426"/>
+                  </a:lnTo>
+                  <a:lnTo>
+                    <a:pt x="4655464" y="1504524"/>
+                  </a:lnTo>
+                  <a:lnTo>
+                    <a:pt x="4727086" y="1414724"/>
+                  </a:lnTo>
+                  <a:lnTo>
+                    <a:pt x="4798709" y="1320849"/>
+                  </a:lnTo>
+                  <a:lnTo>
+                    <a:pt x="4870331" y="1222716"/>
+                  </a:lnTo>
+                  <a:lnTo>
+                    <a:pt x="4941954" y="1120130"/>
+                  </a:lnTo>
+                  <a:lnTo>
+                    <a:pt x="5013576" y="1012889"/>
+                  </a:lnTo>
+                  <a:lnTo>
+                    <a:pt x="5085199" y="900783"/>
+                  </a:lnTo>
+                  <a:lnTo>
+                    <a:pt x="5156821" y="783590"/>
+                  </a:lnTo>
+                  <a:lnTo>
+                    <a:pt x="5228444" y="661081"/>
+                  </a:lnTo>
+                  <a:lnTo>
+                    <a:pt x="5300066" y="533012"/>
+                  </a:lnTo>
+                  <a:lnTo>
+                    <a:pt x="5371689" y="399133"/>
+                  </a:lnTo>
+                  <a:lnTo>
+                    <a:pt x="5443311" y="259180"/>
+                  </a:lnTo>
+                  <a:lnTo>
+                    <a:pt x="5514934" y="112877"/>
+                  </a:lnTo>
+                  <a:lnTo>
+                    <a:pt x="5567795" y="0"/>
                   </a:lnTo>
                   <a:lnTo>
                     <a:pt x="7090630" y="0"/>
                   </a:lnTo>
                   <a:lnTo>
-                    <a:pt x="7090630" y="3392566"/>
-                  </a:lnTo>
-                  <a:lnTo>
-                    <a:pt x="7019007" y="3388754"/>
-                  </a:lnTo>
-                  <a:lnTo>
-                    <a:pt x="6947385" y="3384782"/>
-                  </a:lnTo>
-                  <a:lnTo>
-                    <a:pt x="6875762" y="3380644"/>
-                  </a:lnTo>
-                  <a:lnTo>
-                    <a:pt x="6804139" y="3376333"/>
-                  </a:lnTo>
-                  <a:lnTo>
-                    <a:pt x="6732517" y="3371842"/>
-                  </a:lnTo>
-                  <a:lnTo>
-                    <a:pt x="6660894" y="3367164"/>
-                  </a:lnTo>
-                  <a:lnTo>
-                    <a:pt x="6589272" y="3362289"/>
-                  </a:lnTo>
-                  <a:lnTo>
-                    <a:pt x="6517649" y="3357211"/>
-                  </a:lnTo>
-                  <a:lnTo>
-                    <a:pt x="6446027" y="3351920"/>
-                  </a:lnTo>
-                  <a:lnTo>
-                    <a:pt x="6374404" y="3346409"/>
-                  </a:lnTo>
-                  <a:lnTo>
-                    <a:pt x="6302782" y="3340666"/>
-                  </a:lnTo>
-                  <a:lnTo>
-                    <a:pt x="6231159" y="3334684"/>
-                  </a:lnTo>
-                  <a:lnTo>
-                    <a:pt x="6159537" y="3328452"/>
-                  </a:lnTo>
-                  <a:lnTo>
-                    <a:pt x="6087914" y="3321959"/>
-                  </a:lnTo>
-                  <a:lnTo>
-                    <a:pt x="6016292" y="3315194"/>
-                  </a:lnTo>
-                  <a:lnTo>
-                    <a:pt x="5944669" y="3308147"/>
-                  </a:lnTo>
-                  <a:lnTo>
-                    <a:pt x="5873047" y="3300805"/>
-                  </a:lnTo>
-                  <a:lnTo>
-                    <a:pt x="5801424" y="3293156"/>
-                  </a:lnTo>
-                  <a:lnTo>
-                    <a:pt x="5729802" y="3285187"/>
-                  </a:lnTo>
-                  <a:lnTo>
-                    <a:pt x="5658179" y="3276885"/>
-                  </a:lnTo>
-                  <a:lnTo>
-                    <a:pt x="5586557" y="3268236"/>
-                  </a:lnTo>
-                  <a:lnTo>
-                    <a:pt x="5514934" y="3259225"/>
-                  </a:lnTo>
-                  <a:lnTo>
-                    <a:pt x="5443311" y="3249838"/>
-                  </a:lnTo>
-                  <a:lnTo>
-                    <a:pt x="5371689" y="3240058"/>
-                  </a:lnTo>
-                  <a:lnTo>
-                    <a:pt x="5300066" y="3229869"/>
-                  </a:lnTo>
-                  <a:lnTo>
-                    <a:pt x="5228444" y="3219254"/>
-                  </a:lnTo>
-                  <a:lnTo>
-                    <a:pt x="5156821" y="3208195"/>
-                  </a:lnTo>
-                  <a:lnTo>
-                    <a:pt x="5085199" y="3196674"/>
-                  </a:lnTo>
-                  <a:lnTo>
-                    <a:pt x="5013576" y="3184671"/>
-                  </a:lnTo>
-                  <a:lnTo>
-                    <a:pt x="4941954" y="3172167"/>
-                  </a:lnTo>
-                  <a:lnTo>
-                    <a:pt x="4870331" y="3159139"/>
-                  </a:lnTo>
-                  <a:lnTo>
-                    <a:pt x="4798709" y="3145567"/>
-                  </a:lnTo>
-                  <a:lnTo>
-                    <a:pt x="4727086" y="3131428"/>
-                  </a:lnTo>
-                  <a:lnTo>
-                    <a:pt x="4655464" y="3116697"/>
-                  </a:lnTo>
-                  <a:lnTo>
-                    <a:pt x="4583841" y="3101350"/>
-                  </a:lnTo>
-                  <a:lnTo>
-                    <a:pt x="4512219" y="3085362"/>
-                  </a:lnTo>
-                  <a:lnTo>
-                    <a:pt x="4440596" y="3068705"/>
-                  </a:lnTo>
-                  <a:lnTo>
-                    <a:pt x="4368974" y="3051352"/>
-                  </a:lnTo>
-                  <a:lnTo>
-                    <a:pt x="4297351" y="3033273"/>
-                  </a:lnTo>
-                  <a:lnTo>
-                    <a:pt x="4225729" y="3014438"/>
-                  </a:lnTo>
-                  <a:lnTo>
-                    <a:pt x="4154106" y="2994816"/>
-                  </a:lnTo>
-                  <a:lnTo>
-                    <a:pt x="4082483" y="2974373"/>
-                  </a:lnTo>
-                  <a:lnTo>
-                    <a:pt x="4010861" y="2953076"/>
-                  </a:lnTo>
-                  <a:lnTo>
-                    <a:pt x="3939238" y="2930888"/>
-                  </a:lnTo>
-                  <a:lnTo>
-                    <a:pt x="3867616" y="2907772"/>
-                  </a:lnTo>
-                  <a:lnTo>
-                    <a:pt x="3795993" y="2883690"/>
-                  </a:lnTo>
-                  <a:lnTo>
-                    <a:pt x="3724371" y="2858601"/>
-                  </a:lnTo>
-                  <a:lnTo>
-                    <a:pt x="3652748" y="2832463"/>
-                  </a:lnTo>
-                  <a:lnTo>
-                    <a:pt x="3581126" y="2805232"/>
-                  </a:lnTo>
-                  <a:lnTo>
-                    <a:pt x="3509503" y="2776863"/>
-                  </a:lnTo>
-                  <a:lnTo>
-                    <a:pt x="3437881" y="2747307"/>
-                  </a:lnTo>
-                  <a:lnTo>
-                    <a:pt x="3366258" y="2716516"/>
-                  </a:lnTo>
-                  <a:lnTo>
-                    <a:pt x="3294636" y="2684437"/>
-                  </a:lnTo>
-                  <a:lnTo>
-                    <a:pt x="3223013" y="2657829"/>
-                  </a:lnTo>
-                  <a:lnTo>
-                    <a:pt x="3151391" y="2693904"/>
-                  </a:lnTo>
-                  <a:lnTo>
-                    <a:pt x="3079768" y="2728403"/>
-                  </a:lnTo>
-                  <a:lnTo>
-                    <a:pt x="3008146" y="2761396"/>
-                  </a:lnTo>
-                  <a:lnTo>
-                    <a:pt x="2936523" y="2792948"/>
-                  </a:lnTo>
-                  <a:lnTo>
-                    <a:pt x="2864901" y="2823121"/>
-                  </a:lnTo>
-                  <a:lnTo>
-                    <a:pt x="2793278" y="2851977"/>
-                  </a:lnTo>
-                  <a:lnTo>
-                    <a:pt x="2721655" y="2879572"/>
-                  </a:lnTo>
-                  <a:lnTo>
-                    <a:pt x="2650033" y="2905962"/>
-                  </a:lnTo>
-                  <a:lnTo>
-                    <a:pt x="2578410" y="2931199"/>
-                  </a:lnTo>
-                  <a:lnTo>
-                    <a:pt x="2506788" y="2955333"/>
-                  </a:lnTo>
-                  <a:lnTo>
-                    <a:pt x="2435165" y="2978414"/>
-                  </a:lnTo>
-                  <a:lnTo>
-                    <a:pt x="2363543" y="3000486"/>
-                  </a:lnTo>
-                  <a:lnTo>
-                    <a:pt x="2291920" y="3021595"/>
-                  </a:lnTo>
-                  <a:lnTo>
-                    <a:pt x="2220298" y="3041781"/>
-                  </a:lnTo>
-                  <a:lnTo>
-                    <a:pt x="2148675" y="3061086"/>
-                  </a:lnTo>
-                  <a:lnTo>
-                    <a:pt x="2077053" y="3079547"/>
-                  </a:lnTo>
-                  <a:lnTo>
-                    <a:pt x="2005430" y="3097202"/>
-                  </a:lnTo>
-                  <a:lnTo>
-                    <a:pt x="1933808" y="3114086"/>
-                  </a:lnTo>
-                  <a:lnTo>
-                    <a:pt x="1862185" y="3130232"/>
-                  </a:lnTo>
-                  <a:lnTo>
-                    <a:pt x="1790563" y="3145674"/>
-                  </a:lnTo>
-                  <a:lnTo>
-                    <a:pt x="1718940" y="3160440"/>
-                  </a:lnTo>
-                  <a:lnTo>
-                    <a:pt x="1647318" y="3174562"/>
-                  </a:lnTo>
-                  <a:lnTo>
-                    <a:pt x="1575695" y="3188067"/>
-                  </a:lnTo>
-                  <a:lnTo>
-                    <a:pt x="1504073" y="3200982"/>
-                  </a:lnTo>
-                  <a:lnTo>
-                    <a:pt x="1432450" y="3213333"/>
-                  </a:lnTo>
-                  <a:lnTo>
-                    <a:pt x="1360827" y="3225144"/>
-                  </a:lnTo>
-                  <a:lnTo>
-                    <a:pt x="1289205" y="3236440"/>
-                  </a:lnTo>
-                  <a:lnTo>
-                    <a:pt x="1217582" y="3247242"/>
-                  </a:lnTo>
-                  <a:lnTo>
-                    <a:pt x="1145960" y="3257572"/>
-                  </a:lnTo>
-                  <a:lnTo>
-                    <a:pt x="1074337" y="3267451"/>
-                  </a:lnTo>
-                  <a:lnTo>
-                    <a:pt x="1002715" y="3276899"/>
-                  </a:lnTo>
-                  <a:lnTo>
-                    <a:pt x="931092" y="3285934"/>
-                  </a:lnTo>
-                  <a:lnTo>
-                    <a:pt x="859470" y="3294574"/>
-                  </a:lnTo>
-                  <a:lnTo>
-                    <a:pt x="787847" y="3302837"/>
-                  </a:lnTo>
-                  <a:lnTo>
-                    <a:pt x="716225" y="3310739"/>
-                  </a:lnTo>
-                  <a:lnTo>
-                    <a:pt x="644602" y="3318296"/>
-                  </a:lnTo>
-                  <a:lnTo>
-                    <a:pt x="572980" y="3325522"/>
-                  </a:lnTo>
-                  <a:lnTo>
-                    <a:pt x="501357" y="3332433"/>
-                  </a:lnTo>
-                  <a:lnTo>
-                    <a:pt x="429735" y="3339043"/>
-                  </a:lnTo>
-                  <a:lnTo>
-                    <a:pt x="358112" y="3345363"/>
-                  </a:lnTo>
-                  <a:lnTo>
-                    <a:pt x="286490" y="3351408"/>
-                  </a:lnTo>
-                  <a:lnTo>
-                    <a:pt x="214867" y="3357188"/>
-                  </a:lnTo>
-                  <a:lnTo>
-                    <a:pt x="143245" y="3362716"/>
-                  </a:lnTo>
-                  <a:lnTo>
-                    <a:pt x="71622" y="3368002"/>
-                  </a:lnTo>
-                  <a:lnTo>
-                    <a:pt x="0" y="3373058"/>
+                    <a:pt x="7090630" y="3392429"/>
+                  </a:lnTo>
+                  <a:lnTo>
+                    <a:pt x="7019007" y="3388591"/>
+                  </a:lnTo>
+                  <a:lnTo>
+                    <a:pt x="6947385" y="3384592"/>
+                  </a:lnTo>
+                  <a:lnTo>
+                    <a:pt x="6875762" y="3380426"/>
+                  </a:lnTo>
+                  <a:lnTo>
+                    <a:pt x="6804139" y="3376084"/>
+                  </a:lnTo>
+                  <a:lnTo>
+                    <a:pt x="6732517" y="3371559"/>
+                  </a:lnTo>
+                  <a:lnTo>
+                    <a:pt x="6660894" y="3366845"/>
+                  </a:lnTo>
+                  <a:lnTo>
+                    <a:pt x="6589272" y="3361932"/>
+                  </a:lnTo>
+                  <a:lnTo>
+                    <a:pt x="6517649" y="3356813"/>
+                  </a:lnTo>
+                  <a:lnTo>
+                    <a:pt x="6446027" y="3351478"/>
+                  </a:lnTo>
+                  <a:lnTo>
+                    <a:pt x="6374404" y="3345920"/>
+                  </a:lnTo>
+                  <a:lnTo>
+                    <a:pt x="6302782" y="3340128"/>
+                  </a:lnTo>
+                  <a:lnTo>
+                    <a:pt x="6231159" y="3334092"/>
+                  </a:lnTo>
+                  <a:lnTo>
+                    <a:pt x="6159537" y="3327803"/>
+                  </a:lnTo>
+                  <a:lnTo>
+                    <a:pt x="6087914" y="3321250"/>
+                  </a:lnTo>
+                  <a:lnTo>
+                    <a:pt x="6016292" y="3314421"/>
+                  </a:lnTo>
+                  <a:lnTo>
+                    <a:pt x="5944669" y="3307306"/>
+                  </a:lnTo>
+                  <a:lnTo>
+                    <a:pt x="5873047" y="3299891"/>
+                  </a:lnTo>
+                  <a:lnTo>
+                    <a:pt x="5801424" y="3292164"/>
+                  </a:lnTo>
+                  <a:lnTo>
+                    <a:pt x="5729802" y="3284113"/>
+                  </a:lnTo>
+                  <a:lnTo>
+                    <a:pt x="5658179" y="3275724"/>
+                  </a:lnTo>
+                  <a:lnTo>
+                    <a:pt x="5586557" y="3266982"/>
+                  </a:lnTo>
+                  <a:lnTo>
+                    <a:pt x="5514934" y="3257873"/>
+                  </a:lnTo>
+                  <a:lnTo>
+                    <a:pt x="5443311" y="3248381"/>
+                  </a:lnTo>
+                  <a:lnTo>
+                    <a:pt x="5371689" y="3238489"/>
+                  </a:lnTo>
+                  <a:lnTo>
+                    <a:pt x="5300066" y="3228183"/>
+                  </a:lnTo>
+                  <a:lnTo>
+                    <a:pt x="5228444" y="3217443"/>
+                  </a:lnTo>
+                  <a:lnTo>
+                    <a:pt x="5156821" y="3206252"/>
+                  </a:lnTo>
+                  <a:lnTo>
+                    <a:pt x="5085199" y="3194590"/>
+                  </a:lnTo>
+                  <a:lnTo>
+                    <a:pt x="5013576" y="3182439"/>
+                  </a:lnTo>
+                  <a:lnTo>
+                    <a:pt x="4941954" y="3169777"/>
+                  </a:lnTo>
+                  <a:lnTo>
+                    <a:pt x="4870331" y="3156582"/>
+                  </a:lnTo>
+                  <a:lnTo>
+                    <a:pt x="4798709" y="3142833"/>
+                  </a:lnTo>
+                  <a:lnTo>
+                    <a:pt x="4727086" y="3128507"/>
+                  </a:lnTo>
+                  <a:lnTo>
+                    <a:pt x="4655464" y="3113578"/>
+                  </a:lnTo>
+                  <a:lnTo>
+                    <a:pt x="4583841" y="3098022"/>
+                  </a:lnTo>
+                  <a:lnTo>
+                    <a:pt x="4512219" y="3081813"/>
+                  </a:lnTo>
+                  <a:lnTo>
+                    <a:pt x="4440596" y="3064922"/>
+                  </a:lnTo>
+                  <a:lnTo>
+                    <a:pt x="4368974" y="3047321"/>
+                  </a:lnTo>
+                  <a:lnTo>
+                    <a:pt x="4297351" y="3028981"/>
+                  </a:lnTo>
+                  <a:lnTo>
+                    <a:pt x="4225729" y="3009869"/>
+                  </a:lnTo>
+                  <a:lnTo>
+                    <a:pt x="4154106" y="2989955"/>
+                  </a:lnTo>
+                  <a:lnTo>
+                    <a:pt x="4082483" y="2969204"/>
+                  </a:lnTo>
+                  <a:lnTo>
+                    <a:pt x="4010861" y="2947581"/>
+                  </a:lnTo>
+                  <a:lnTo>
+                    <a:pt x="3939238" y="2925049"/>
+                  </a:lnTo>
+                  <a:lnTo>
+                    <a:pt x="3867616" y="2901570"/>
+                  </a:lnTo>
+                  <a:lnTo>
+                    <a:pt x="3795993" y="2877105"/>
+                  </a:lnTo>
+                  <a:lnTo>
+                    <a:pt x="3724371" y="2851611"/>
+                  </a:lnTo>
+                  <a:lnTo>
+                    <a:pt x="3652748" y="2825046"/>
+                  </a:lnTo>
+                  <a:lnTo>
+                    <a:pt x="3581126" y="2797365"/>
+                  </a:lnTo>
+                  <a:lnTo>
+                    <a:pt x="3509503" y="2768520"/>
+                  </a:lnTo>
+                  <a:lnTo>
+                    <a:pt x="3437881" y="2738464"/>
+                  </a:lnTo>
+                  <a:lnTo>
+                    <a:pt x="3366258" y="2707144"/>
+                  </a:lnTo>
+                  <a:lnTo>
+                    <a:pt x="3294636" y="2674508"/>
+                  </a:lnTo>
+                  <a:lnTo>
+                    <a:pt x="3223013" y="2668887"/>
+                  </a:lnTo>
+                  <a:lnTo>
+                    <a:pt x="3151391" y="2704254"/>
+                  </a:lnTo>
+                  <a:lnTo>
+                    <a:pt x="3079768" y="2738086"/>
+                  </a:lnTo>
+                  <a:lnTo>
+                    <a:pt x="3008146" y="2770449"/>
+                  </a:lnTo>
+                  <a:lnTo>
+                    <a:pt x="2936523" y="2801407"/>
+                  </a:lnTo>
+                  <a:lnTo>
+                    <a:pt x="2864901" y="2831022"/>
+                  </a:lnTo>
+                  <a:lnTo>
+                    <a:pt x="2793278" y="2859352"/>
+                  </a:lnTo>
+                  <a:lnTo>
+                    <a:pt x="2721655" y="2886452"/>
+                  </a:lnTo>
+                  <a:lnTo>
+                    <a:pt x="2650033" y="2912376"/>
+                  </a:lnTo>
+                  <a:lnTo>
+                    <a:pt x="2578410" y="2937175"/>
+                  </a:lnTo>
+                  <a:lnTo>
+                    <a:pt x="2506788" y="2960897"/>
+                  </a:lnTo>
+                  <a:lnTo>
+                    <a:pt x="2435165" y="2983590"/>
+                  </a:lnTo>
+                  <a:lnTo>
+                    <a:pt x="2363543" y="3005298"/>
+                  </a:lnTo>
+                  <a:lnTo>
+                    <a:pt x="2291920" y="3026063"/>
+                  </a:lnTo>
+                  <a:lnTo>
+                    <a:pt x="2220298" y="3045928"/>
+                  </a:lnTo>
+                  <a:lnTo>
+                    <a:pt x="2148675" y="3064930"/>
+                  </a:lnTo>
+                  <a:lnTo>
+                    <a:pt x="2077053" y="3083108"/>
+                  </a:lnTo>
+                  <a:lnTo>
+                    <a:pt x="2005430" y="3100496"/>
+                  </a:lnTo>
+                  <a:lnTo>
+                    <a:pt x="1933808" y="3117130"/>
+                  </a:lnTo>
+                  <a:lnTo>
+                    <a:pt x="1862185" y="3133042"/>
+                  </a:lnTo>
+                  <a:lnTo>
+                    <a:pt x="1790563" y="3148263"/>
+                  </a:lnTo>
+                  <a:lnTo>
+                    <a:pt x="1718940" y="3162824"/>
+                  </a:lnTo>
+                  <a:lnTo>
+                    <a:pt x="1647318" y="3176753"/>
+                  </a:lnTo>
+                  <a:lnTo>
+                    <a:pt x="1575695" y="3190077"/>
+                  </a:lnTo>
+                  <a:lnTo>
+                    <a:pt x="1504073" y="3202823"/>
+                  </a:lnTo>
+                  <a:lnTo>
+                    <a:pt x="1432450" y="3215016"/>
+                  </a:lnTo>
+                  <a:lnTo>
+                    <a:pt x="1360827" y="3226679"/>
+                  </a:lnTo>
+                  <a:lnTo>
+                    <a:pt x="1289205" y="3237836"/>
+                  </a:lnTo>
+                  <a:lnTo>
+                    <a:pt x="1217582" y="3248509"/>
+                  </a:lnTo>
+                  <a:lnTo>
+                    <a:pt x="1145960" y="3258719"/>
+                  </a:lnTo>
+                  <a:lnTo>
+                    <a:pt x="1074337" y="3268486"/>
+                  </a:lnTo>
+                  <a:lnTo>
+                    <a:pt x="1002715" y="3277829"/>
+                  </a:lnTo>
+                  <a:lnTo>
+                    <a:pt x="931092" y="3286766"/>
+                  </a:lnTo>
+                  <a:lnTo>
+                    <a:pt x="859470" y="3295315"/>
+                  </a:lnTo>
+                  <a:lnTo>
+                    <a:pt x="787847" y="3303494"/>
+                  </a:lnTo>
+                  <a:lnTo>
+                    <a:pt x="716225" y="3311317"/>
+                  </a:lnTo>
+                  <a:lnTo>
+                    <a:pt x="644602" y="3318801"/>
+                  </a:lnTo>
+                  <a:lnTo>
+                    <a:pt x="572980" y="3325960"/>
+                  </a:lnTo>
+                  <a:lnTo>
+                    <a:pt x="501357" y="3332808"/>
+                  </a:lnTo>
+                  <a:lnTo>
+                    <a:pt x="429735" y="3339359"/>
+                  </a:lnTo>
+                  <a:lnTo>
+                    <a:pt x="358112" y="3345626"/>
+                  </a:lnTo>
+                  <a:lnTo>
+                    <a:pt x="286490" y="3351621"/>
+                  </a:lnTo>
+                  <a:lnTo>
+                    <a:pt x="214867" y="3357355"/>
+                  </a:lnTo>
+                  <a:lnTo>
+                    <a:pt x="143245" y="3362841"/>
+                  </a:lnTo>
+                  <a:lnTo>
+                    <a:pt x="71622" y="3368088"/>
+                  </a:lnTo>
+                  <a:lnTo>
+                    <a:pt x="0" y="3373108"/>
                   </a:lnTo>
                   <a:close/>
                 </a:path>
@@ -3543,219 +3543,219 @@
           </p:nvSpPr>
           <p:spPr>
             <a:xfrm>
-              <a:off x="1892665" y="2073503"/>
-              <a:ext cx="4810384" cy="2651018"/>
+              <a:off x="1927220" y="2073503"/>
+              <a:ext cx="4812624" cy="2640500"/>
             </a:xfrm>
             <a:custGeom>
               <a:avLst/>
               <a:pathLst>
-                <a:path w="4810384" h="2651018">
+                <a:path w="4812624" h="2640500">
                   <a:moveTo>
                     <a:pt x="0" y="0"/>
                   </a:moveTo>
                   <a:lnTo>
-                    <a:pt x="67231" y="131564"/>
-                  </a:lnTo>
-                  <a:lnTo>
-                    <a:pt x="138853" y="266097"/>
-                  </a:lnTo>
-                  <a:lnTo>
-                    <a:pt x="210476" y="395231"/>
-                  </a:lnTo>
-                  <a:lnTo>
-                    <a:pt x="282098" y="519183"/>
-                  </a:lnTo>
-                  <a:lnTo>
-                    <a:pt x="353721" y="638159"/>
-                  </a:lnTo>
-                  <a:lnTo>
-                    <a:pt x="425343" y="752361"/>
-                  </a:lnTo>
-                  <a:lnTo>
-                    <a:pt x="496966" y="861980"/>
-                  </a:lnTo>
-                  <a:lnTo>
-                    <a:pt x="568588" y="967199"/>
-                  </a:lnTo>
-                  <a:lnTo>
-                    <a:pt x="640211" y="1068196"/>
-                  </a:lnTo>
-                  <a:lnTo>
-                    <a:pt x="711833" y="1165139"/>
-                  </a:lnTo>
-                  <a:lnTo>
-                    <a:pt x="783456" y="1258192"/>
-                  </a:lnTo>
-                  <a:lnTo>
-                    <a:pt x="855078" y="1347510"/>
-                  </a:lnTo>
-                  <a:lnTo>
-                    <a:pt x="926701" y="1433244"/>
-                  </a:lnTo>
-                  <a:lnTo>
-                    <a:pt x="998323" y="1515537"/>
-                  </a:lnTo>
-                  <a:lnTo>
-                    <a:pt x="1069946" y="1594527"/>
-                  </a:lnTo>
-                  <a:lnTo>
-                    <a:pt x="1141569" y="1670347"/>
-                  </a:lnTo>
-                  <a:lnTo>
-                    <a:pt x="1213191" y="1743124"/>
-                  </a:lnTo>
-                  <a:lnTo>
-                    <a:pt x="1284814" y="1812980"/>
-                  </a:lnTo>
-                  <a:lnTo>
-                    <a:pt x="1356436" y="1880033"/>
-                  </a:lnTo>
-                  <a:lnTo>
-                    <a:pt x="1428059" y="1944395"/>
-                  </a:lnTo>
-                  <a:lnTo>
-                    <a:pt x="1499681" y="2006174"/>
-                  </a:lnTo>
-                  <a:lnTo>
-                    <a:pt x="1571304" y="2065473"/>
-                  </a:lnTo>
-                  <a:lnTo>
-                    <a:pt x="1642926" y="2122393"/>
-                  </a:lnTo>
-                  <a:lnTo>
-                    <a:pt x="1714549" y="2177028"/>
-                  </a:lnTo>
-                  <a:lnTo>
-                    <a:pt x="1786171" y="2229471"/>
-                  </a:lnTo>
-                  <a:lnTo>
-                    <a:pt x="1857794" y="2279809"/>
-                  </a:lnTo>
-                  <a:lnTo>
-                    <a:pt x="1929416" y="2328126"/>
-                  </a:lnTo>
-                  <a:lnTo>
-                    <a:pt x="2001039" y="2374505"/>
-                  </a:lnTo>
-                  <a:lnTo>
-                    <a:pt x="2072661" y="2419022"/>
-                  </a:lnTo>
-                  <a:lnTo>
-                    <a:pt x="2144284" y="2461752"/>
-                  </a:lnTo>
-                  <a:lnTo>
-                    <a:pt x="2215906" y="2502768"/>
-                  </a:lnTo>
-                  <a:lnTo>
-                    <a:pt x="2287529" y="2542138"/>
-                  </a:lnTo>
-                  <a:lnTo>
-                    <a:pt x="2359151" y="2579927"/>
-                  </a:lnTo>
-                  <a:lnTo>
-                    <a:pt x="2430774" y="2616200"/>
-                  </a:lnTo>
-                  <a:lnTo>
-                    <a:pt x="2502397" y="2651018"/>
-                  </a:lnTo>
-                  <a:lnTo>
-                    <a:pt x="2574019" y="2620106"/>
-                  </a:lnTo>
-                  <a:lnTo>
-                    <a:pt x="2645642" y="2580660"/>
-                  </a:lnTo>
-                  <a:lnTo>
-                    <a:pt x="2717264" y="2539412"/>
-                  </a:lnTo>
-                  <a:lnTo>
-                    <a:pt x="2788887" y="2496280"/>
-                  </a:lnTo>
-                  <a:lnTo>
-                    <a:pt x="2860509" y="2451179"/>
-                  </a:lnTo>
-                  <a:lnTo>
-                    <a:pt x="2932132" y="2404017"/>
-                  </a:lnTo>
-                  <a:lnTo>
-                    <a:pt x="3003754" y="2354702"/>
-                  </a:lnTo>
-                  <a:lnTo>
-                    <a:pt x="3075377" y="2303134"/>
-                  </a:lnTo>
-                  <a:lnTo>
-                    <a:pt x="3146999" y="2249210"/>
-                  </a:lnTo>
-                  <a:lnTo>
-                    <a:pt x="3218622" y="2192824"/>
-                  </a:lnTo>
-                  <a:lnTo>
-                    <a:pt x="3290244" y="2133862"/>
-                  </a:lnTo>
-                  <a:lnTo>
-                    <a:pt x="3361867" y="2072208"/>
-                  </a:lnTo>
-                  <a:lnTo>
-                    <a:pt x="3433489" y="2007737"/>
-                  </a:lnTo>
-                  <a:lnTo>
-                    <a:pt x="3505112" y="1940322"/>
-                  </a:lnTo>
-                  <a:lnTo>
-                    <a:pt x="3576734" y="1869827"/>
-                  </a:lnTo>
-                  <a:lnTo>
-                    <a:pt x="3648357" y="1796113"/>
-                  </a:lnTo>
-                  <a:lnTo>
-                    <a:pt x="3719979" y="1719032"/>
-                  </a:lnTo>
-                  <a:lnTo>
-                    <a:pt x="3791602" y="1638430"/>
-                  </a:lnTo>
-                  <a:lnTo>
-                    <a:pt x="3863225" y="1554147"/>
-                  </a:lnTo>
-                  <a:lnTo>
-                    <a:pt x="3934847" y="1466014"/>
-                  </a:lnTo>
-                  <a:lnTo>
-                    <a:pt x="4006470" y="1373856"/>
-                  </a:lnTo>
-                  <a:lnTo>
-                    <a:pt x="4078092" y="1277489"/>
-                  </a:lnTo>
-                  <a:lnTo>
-                    <a:pt x="4149715" y="1176720"/>
-                  </a:lnTo>
-                  <a:lnTo>
-                    <a:pt x="4221337" y="1071349"/>
-                  </a:lnTo>
-                  <a:lnTo>
-                    <a:pt x="4292960" y="961165"/>
-                  </a:lnTo>
-                  <a:lnTo>
-                    <a:pt x="4364582" y="845949"/>
-                  </a:lnTo>
-                  <a:lnTo>
-                    <a:pt x="4436205" y="725470"/>
-                  </a:lnTo>
-                  <a:lnTo>
-                    <a:pt x="4507827" y="599488"/>
-                  </a:lnTo>
-                  <a:lnTo>
-                    <a:pt x="4579450" y="467752"/>
-                  </a:lnTo>
-                  <a:lnTo>
-                    <a:pt x="4651072" y="330000"/>
-                  </a:lnTo>
-                  <a:lnTo>
-                    <a:pt x="4722695" y="185955"/>
-                  </a:lnTo>
-                  <a:lnTo>
-                    <a:pt x="4794317" y="35332"/>
-                  </a:lnTo>
-                  <a:lnTo>
-                    <a:pt x="4810384" y="0"/>
+                    <a:pt x="32676" y="65537"/>
+                  </a:lnTo>
+                  <a:lnTo>
+                    <a:pt x="104299" y="203391"/>
+                  </a:lnTo>
+                  <a:lnTo>
+                    <a:pt x="175922" y="335685"/>
+                  </a:lnTo>
+                  <a:lnTo>
+                    <a:pt x="247544" y="462645"/>
+                  </a:lnTo>
+                  <a:lnTo>
+                    <a:pt x="319167" y="584484"/>
+                  </a:lnTo>
+                  <a:lnTo>
+                    <a:pt x="390789" y="701409"/>
+                  </a:lnTo>
+                  <a:lnTo>
+                    <a:pt x="462412" y="813619"/>
+                  </a:lnTo>
+                  <a:lnTo>
+                    <a:pt x="534034" y="921303"/>
+                  </a:lnTo>
+                  <a:lnTo>
+                    <a:pt x="605657" y="1024645"/>
+                  </a:lnTo>
+                  <a:lnTo>
+                    <a:pt x="677279" y="1123819"/>
+                  </a:lnTo>
+                  <a:lnTo>
+                    <a:pt x="748902" y="1218993"/>
+                  </a:lnTo>
+                  <a:lnTo>
+                    <a:pt x="820524" y="1310329"/>
+                  </a:lnTo>
+                  <a:lnTo>
+                    <a:pt x="892147" y="1397981"/>
+                  </a:lnTo>
+                  <a:lnTo>
+                    <a:pt x="963769" y="1482099"/>
+                  </a:lnTo>
+                  <a:lnTo>
+                    <a:pt x="1035392" y="1562824"/>
+                  </a:lnTo>
+                  <a:lnTo>
+                    <a:pt x="1107014" y="1640293"/>
+                  </a:lnTo>
+                  <a:lnTo>
+                    <a:pt x="1178637" y="1714638"/>
+                  </a:lnTo>
+                  <a:lnTo>
+                    <a:pt x="1250259" y="1785985"/>
+                  </a:lnTo>
+                  <a:lnTo>
+                    <a:pt x="1321882" y="1854455"/>
+                  </a:lnTo>
+                  <a:lnTo>
+                    <a:pt x="1393504" y="1920163"/>
+                  </a:lnTo>
+                  <a:lnTo>
+                    <a:pt x="1465127" y="1983221"/>
+                  </a:lnTo>
+                  <a:lnTo>
+                    <a:pt x="1536750" y="2043737"/>
+                  </a:lnTo>
+                  <a:lnTo>
+                    <a:pt x="1608372" y="2101811"/>
+                  </a:lnTo>
+                  <a:lnTo>
+                    <a:pt x="1679995" y="2157544"/>
+                  </a:lnTo>
+                  <a:lnTo>
+                    <a:pt x="1751617" y="2211028"/>
+                  </a:lnTo>
+                  <a:lnTo>
+                    <a:pt x="1823240" y="2262356"/>
+                  </a:lnTo>
+                  <a:lnTo>
+                    <a:pt x="1894862" y="2311614"/>
+                  </a:lnTo>
+                  <a:lnTo>
+                    <a:pt x="1966485" y="2358885"/>
+                  </a:lnTo>
+                  <a:lnTo>
+                    <a:pt x="2038107" y="2404250"/>
+                  </a:lnTo>
+                  <a:lnTo>
+                    <a:pt x="2109730" y="2447786"/>
+                  </a:lnTo>
+                  <a:lnTo>
+                    <a:pt x="2181352" y="2489565"/>
+                  </a:lnTo>
+                  <a:lnTo>
+                    <a:pt x="2252975" y="2529660"/>
+                  </a:lnTo>
+                  <a:lnTo>
+                    <a:pt x="2324597" y="2568138"/>
+                  </a:lnTo>
+                  <a:lnTo>
+                    <a:pt x="2396220" y="2605063"/>
+                  </a:lnTo>
+                  <a:lnTo>
+                    <a:pt x="2467842" y="2640500"/>
+                  </a:lnTo>
+                  <a:lnTo>
+                    <a:pt x="2539465" y="2631916"/>
+                  </a:lnTo>
+                  <a:lnTo>
+                    <a:pt x="2611087" y="2593267"/>
+                  </a:lnTo>
+                  <a:lnTo>
+                    <a:pt x="2682710" y="2552865"/>
+                  </a:lnTo>
+                  <a:lnTo>
+                    <a:pt x="2754332" y="2510630"/>
+                  </a:lnTo>
+                  <a:lnTo>
+                    <a:pt x="2825955" y="2466478"/>
+                  </a:lnTo>
+                  <a:lnTo>
+                    <a:pt x="2897578" y="2420323"/>
+                  </a:lnTo>
+                  <a:lnTo>
+                    <a:pt x="2969200" y="2372074"/>
+                  </a:lnTo>
+                  <a:lnTo>
+                    <a:pt x="3040823" y="2321636"/>
+                  </a:lnTo>
+                  <a:lnTo>
+                    <a:pt x="3112445" y="2268909"/>
+                  </a:lnTo>
+                  <a:lnTo>
+                    <a:pt x="3184068" y="2213791"/>
+                  </a:lnTo>
+                  <a:lnTo>
+                    <a:pt x="3255690" y="2156171"/>
+                  </a:lnTo>
+                  <a:lnTo>
+                    <a:pt x="3327313" y="2095937"/>
+                  </a:lnTo>
+                  <a:lnTo>
+                    <a:pt x="3398935" y="2032970"/>
+                  </a:lnTo>
+                  <a:lnTo>
+                    <a:pt x="3470558" y="1967147"/>
+                  </a:lnTo>
+                  <a:lnTo>
+                    <a:pt x="3542180" y="1898336"/>
+                  </a:lnTo>
+                  <a:lnTo>
+                    <a:pt x="3613803" y="1826404"/>
+                  </a:lnTo>
+                  <a:lnTo>
+                    <a:pt x="3685425" y="1751208"/>
+                  </a:lnTo>
+                  <a:lnTo>
+                    <a:pt x="3757048" y="1672601"/>
+                  </a:lnTo>
+                  <a:lnTo>
+                    <a:pt x="3828670" y="1590426"/>
+                  </a:lnTo>
+                  <a:lnTo>
+                    <a:pt x="3900293" y="1504524"/>
+                  </a:lnTo>
+                  <a:lnTo>
+                    <a:pt x="3971915" y="1414724"/>
+                  </a:lnTo>
+                  <a:lnTo>
+                    <a:pt x="4043538" y="1320849"/>
+                  </a:lnTo>
+                  <a:lnTo>
+                    <a:pt x="4115160" y="1222716"/>
+                  </a:lnTo>
+                  <a:lnTo>
+                    <a:pt x="4186783" y="1120130"/>
+                  </a:lnTo>
+                  <a:lnTo>
+                    <a:pt x="4258406" y="1012889"/>
+                  </a:lnTo>
+                  <a:lnTo>
+                    <a:pt x="4330028" y="900783"/>
+                  </a:lnTo>
+                  <a:lnTo>
+                    <a:pt x="4401651" y="783590"/>
+                  </a:lnTo>
+                  <a:lnTo>
+                    <a:pt x="4473273" y="661081"/>
+                  </a:lnTo>
+                  <a:lnTo>
+                    <a:pt x="4544896" y="533012"/>
+                  </a:lnTo>
+                  <a:lnTo>
+                    <a:pt x="4616518" y="399133"/>
+                  </a:lnTo>
+                  <a:lnTo>
+                    <a:pt x="4688141" y="259180"/>
+                  </a:lnTo>
+                  <a:lnTo>
+                    <a:pt x="4759763" y="112877"/>
+                  </a:lnTo>
+                  <a:lnTo>
+                    <a:pt x="4812624" y="0"/>
                   </a:lnTo>
                 </a:path>
               </a:pathLst>
@@ -3775,312 +3775,312 @@
           </p:nvSpPr>
           <p:spPr>
             <a:xfrm>
-              <a:off x="1172049" y="4731332"/>
-              <a:ext cx="7090630" cy="734737"/>
+              <a:off x="1172049" y="4742390"/>
+              <a:ext cx="7090630" cy="723541"/>
             </a:xfrm>
             <a:custGeom>
               <a:avLst/>
               <a:pathLst>
-                <a:path w="7090630" h="734737">
+                <a:path w="7090630" h="723541">
                   <a:moveTo>
-                    <a:pt x="7090630" y="734737"/>
+                    <a:pt x="7090630" y="723541"/>
                   </a:moveTo>
                   <a:lnTo>
-                    <a:pt x="7019007" y="730925"/>
-                  </a:lnTo>
-                  <a:lnTo>
-                    <a:pt x="6947385" y="726953"/>
-                  </a:lnTo>
-                  <a:lnTo>
-                    <a:pt x="6875762" y="722815"/>
-                  </a:lnTo>
-                  <a:lnTo>
-                    <a:pt x="6804139" y="718504"/>
-                  </a:lnTo>
-                  <a:lnTo>
-                    <a:pt x="6732517" y="714013"/>
-                  </a:lnTo>
-                  <a:lnTo>
-                    <a:pt x="6660894" y="709335"/>
-                  </a:lnTo>
-                  <a:lnTo>
-                    <a:pt x="6589272" y="704460"/>
-                  </a:lnTo>
-                  <a:lnTo>
-                    <a:pt x="6517649" y="699382"/>
-                  </a:lnTo>
-                  <a:lnTo>
-                    <a:pt x="6446027" y="694091"/>
-                  </a:lnTo>
-                  <a:lnTo>
-                    <a:pt x="6374404" y="688579"/>
-                  </a:lnTo>
-                  <a:lnTo>
-                    <a:pt x="6302782" y="682837"/>
-                  </a:lnTo>
-                  <a:lnTo>
-                    <a:pt x="6231159" y="676855"/>
-                  </a:lnTo>
-                  <a:lnTo>
-                    <a:pt x="6159537" y="670622"/>
-                  </a:lnTo>
-                  <a:lnTo>
-                    <a:pt x="6087914" y="664129"/>
-                  </a:lnTo>
-                  <a:lnTo>
-                    <a:pt x="6016292" y="657365"/>
-                  </a:lnTo>
-                  <a:lnTo>
-                    <a:pt x="5944669" y="650318"/>
-                  </a:lnTo>
-                  <a:lnTo>
-                    <a:pt x="5873047" y="642976"/>
-                  </a:lnTo>
-                  <a:lnTo>
-                    <a:pt x="5801424" y="635327"/>
-                  </a:lnTo>
-                  <a:lnTo>
-                    <a:pt x="5729802" y="627358"/>
-                  </a:lnTo>
-                  <a:lnTo>
-                    <a:pt x="5658179" y="619056"/>
-                  </a:lnTo>
-                  <a:lnTo>
-                    <a:pt x="5586557" y="610407"/>
-                  </a:lnTo>
-                  <a:lnTo>
-                    <a:pt x="5514934" y="601396"/>
-                  </a:lnTo>
-                  <a:lnTo>
-                    <a:pt x="5443311" y="592009"/>
-                  </a:lnTo>
-                  <a:lnTo>
-                    <a:pt x="5371689" y="582229"/>
-                  </a:lnTo>
-                  <a:lnTo>
-                    <a:pt x="5300066" y="572040"/>
-                  </a:lnTo>
-                  <a:lnTo>
-                    <a:pt x="5228444" y="561425"/>
-                  </a:lnTo>
-                  <a:lnTo>
-                    <a:pt x="5156821" y="550366"/>
-                  </a:lnTo>
-                  <a:lnTo>
-                    <a:pt x="5085199" y="538845"/>
-                  </a:lnTo>
-                  <a:lnTo>
-                    <a:pt x="5013576" y="526842"/>
-                  </a:lnTo>
-                  <a:lnTo>
-                    <a:pt x="4941954" y="514338"/>
-                  </a:lnTo>
-                  <a:lnTo>
-                    <a:pt x="4870331" y="501310"/>
-                  </a:lnTo>
-                  <a:lnTo>
-                    <a:pt x="4798709" y="487738"/>
-                  </a:lnTo>
-                  <a:lnTo>
-                    <a:pt x="4727086" y="473598"/>
-                  </a:lnTo>
-                  <a:lnTo>
-                    <a:pt x="4655464" y="458868"/>
-                  </a:lnTo>
-                  <a:lnTo>
-                    <a:pt x="4583841" y="443521"/>
-                  </a:lnTo>
-                  <a:lnTo>
-                    <a:pt x="4512219" y="427533"/>
-                  </a:lnTo>
-                  <a:lnTo>
-                    <a:pt x="4440596" y="410876"/>
-                  </a:lnTo>
-                  <a:lnTo>
-                    <a:pt x="4368974" y="393522"/>
-                  </a:lnTo>
-                  <a:lnTo>
-                    <a:pt x="4297351" y="375444"/>
-                  </a:lnTo>
-                  <a:lnTo>
-                    <a:pt x="4225729" y="356609"/>
-                  </a:lnTo>
-                  <a:lnTo>
-                    <a:pt x="4154106" y="336987"/>
-                  </a:lnTo>
-                  <a:lnTo>
-                    <a:pt x="4082483" y="316544"/>
-                  </a:lnTo>
-                  <a:lnTo>
-                    <a:pt x="4010861" y="295246"/>
-                  </a:lnTo>
-                  <a:lnTo>
-                    <a:pt x="3939238" y="273059"/>
-                  </a:lnTo>
-                  <a:lnTo>
-                    <a:pt x="3867616" y="249943"/>
-                  </a:lnTo>
-                  <a:lnTo>
-                    <a:pt x="3795993" y="225861"/>
-                  </a:lnTo>
-                  <a:lnTo>
-                    <a:pt x="3724371" y="200772"/>
-                  </a:lnTo>
-                  <a:lnTo>
-                    <a:pt x="3652748" y="174634"/>
-                  </a:lnTo>
-                  <a:lnTo>
-                    <a:pt x="3581126" y="147403"/>
-                  </a:lnTo>
-                  <a:lnTo>
-                    <a:pt x="3509503" y="119034"/>
-                  </a:lnTo>
-                  <a:lnTo>
-                    <a:pt x="3437881" y="89478"/>
-                  </a:lnTo>
-                  <a:lnTo>
-                    <a:pt x="3366258" y="58687"/>
-                  </a:lnTo>
-                  <a:lnTo>
-                    <a:pt x="3294636" y="26608"/>
+                    <a:pt x="7019007" y="719703"/>
+                  </a:lnTo>
+                  <a:lnTo>
+                    <a:pt x="6947385" y="715705"/>
+                  </a:lnTo>
+                  <a:lnTo>
+                    <a:pt x="6875762" y="711538"/>
+                  </a:lnTo>
+                  <a:lnTo>
+                    <a:pt x="6804139" y="707196"/>
+                  </a:lnTo>
+                  <a:lnTo>
+                    <a:pt x="6732517" y="702671"/>
+                  </a:lnTo>
+                  <a:lnTo>
+                    <a:pt x="6660894" y="697957"/>
+                  </a:lnTo>
+                  <a:lnTo>
+                    <a:pt x="6589272" y="693044"/>
+                  </a:lnTo>
+                  <a:lnTo>
+                    <a:pt x="6517649" y="687925"/>
+                  </a:lnTo>
+                  <a:lnTo>
+                    <a:pt x="6446027" y="682591"/>
+                  </a:lnTo>
+                  <a:lnTo>
+                    <a:pt x="6374404" y="677032"/>
+                  </a:lnTo>
+                  <a:lnTo>
+                    <a:pt x="6302782" y="671240"/>
+                  </a:lnTo>
+                  <a:lnTo>
+                    <a:pt x="6231159" y="665205"/>
+                  </a:lnTo>
+                  <a:lnTo>
+                    <a:pt x="6159537" y="658916"/>
+                  </a:lnTo>
+                  <a:lnTo>
+                    <a:pt x="6087914" y="652362"/>
+                  </a:lnTo>
+                  <a:lnTo>
+                    <a:pt x="6016292" y="645534"/>
+                  </a:lnTo>
+                  <a:lnTo>
+                    <a:pt x="5944669" y="638418"/>
+                  </a:lnTo>
+                  <a:lnTo>
+                    <a:pt x="5873047" y="631003"/>
+                  </a:lnTo>
+                  <a:lnTo>
+                    <a:pt x="5801424" y="623277"/>
+                  </a:lnTo>
+                  <a:lnTo>
+                    <a:pt x="5729802" y="615226"/>
+                  </a:lnTo>
+                  <a:lnTo>
+                    <a:pt x="5658179" y="606836"/>
+                  </a:lnTo>
+                  <a:lnTo>
+                    <a:pt x="5586557" y="598094"/>
+                  </a:lnTo>
+                  <a:lnTo>
+                    <a:pt x="5514934" y="588985"/>
+                  </a:lnTo>
+                  <a:lnTo>
+                    <a:pt x="5443311" y="579493"/>
+                  </a:lnTo>
+                  <a:lnTo>
+                    <a:pt x="5371689" y="569602"/>
+                  </a:lnTo>
+                  <a:lnTo>
+                    <a:pt x="5300066" y="559295"/>
+                  </a:lnTo>
+                  <a:lnTo>
+                    <a:pt x="5228444" y="548555"/>
+                  </a:lnTo>
+                  <a:lnTo>
+                    <a:pt x="5156821" y="537364"/>
+                  </a:lnTo>
+                  <a:lnTo>
+                    <a:pt x="5085199" y="525703"/>
+                  </a:lnTo>
+                  <a:lnTo>
+                    <a:pt x="5013576" y="513551"/>
+                  </a:lnTo>
+                  <a:lnTo>
+                    <a:pt x="4941954" y="500889"/>
+                  </a:lnTo>
+                  <a:lnTo>
+                    <a:pt x="4870331" y="487695"/>
+                  </a:lnTo>
+                  <a:lnTo>
+                    <a:pt x="4798709" y="473946"/>
+                  </a:lnTo>
+                  <a:lnTo>
+                    <a:pt x="4727086" y="459619"/>
+                  </a:lnTo>
+                  <a:lnTo>
+                    <a:pt x="4655464" y="444691"/>
+                  </a:lnTo>
+                  <a:lnTo>
+                    <a:pt x="4583841" y="429135"/>
+                  </a:lnTo>
+                  <a:lnTo>
+                    <a:pt x="4512219" y="412925"/>
+                  </a:lnTo>
+                  <a:lnTo>
+                    <a:pt x="4440596" y="396034"/>
+                  </a:lnTo>
+                  <a:lnTo>
+                    <a:pt x="4368974" y="378433"/>
+                  </a:lnTo>
+                  <a:lnTo>
+                    <a:pt x="4297351" y="360093"/>
+                  </a:lnTo>
+                  <a:lnTo>
+                    <a:pt x="4225729" y="340982"/>
+                  </a:lnTo>
+                  <a:lnTo>
+                    <a:pt x="4154106" y="321067"/>
+                  </a:lnTo>
+                  <a:lnTo>
+                    <a:pt x="4082483" y="300316"/>
+                  </a:lnTo>
+                  <a:lnTo>
+                    <a:pt x="4010861" y="278693"/>
+                  </a:lnTo>
+                  <a:lnTo>
+                    <a:pt x="3939238" y="256161"/>
+                  </a:lnTo>
+                  <a:lnTo>
+                    <a:pt x="3867616" y="232682"/>
+                  </a:lnTo>
+                  <a:lnTo>
+                    <a:pt x="3795993" y="208217"/>
+                  </a:lnTo>
+                  <a:lnTo>
+                    <a:pt x="3724371" y="182723"/>
+                  </a:lnTo>
+                  <a:lnTo>
+                    <a:pt x="3652748" y="156158"/>
+                  </a:lnTo>
+                  <a:lnTo>
+                    <a:pt x="3581126" y="128477"/>
+                  </a:lnTo>
+                  <a:lnTo>
+                    <a:pt x="3509503" y="99633"/>
+                  </a:lnTo>
+                  <a:lnTo>
+                    <a:pt x="3437881" y="69576"/>
+                  </a:lnTo>
+                  <a:lnTo>
+                    <a:pt x="3366258" y="38256"/>
+                  </a:lnTo>
+                  <a:lnTo>
+                    <a:pt x="3294636" y="5620"/>
                   </a:lnTo>
                   <a:lnTo>
                     <a:pt x="3223013" y="0"/>
                   </a:lnTo>
                   <a:lnTo>
-                    <a:pt x="3151391" y="36075"/>
-                  </a:lnTo>
-                  <a:lnTo>
-                    <a:pt x="3079768" y="70574"/>
-                  </a:lnTo>
-                  <a:lnTo>
-                    <a:pt x="3008146" y="103567"/>
-                  </a:lnTo>
-                  <a:lnTo>
-                    <a:pt x="2936523" y="135119"/>
-                  </a:lnTo>
-                  <a:lnTo>
-                    <a:pt x="2864901" y="165292"/>
-                  </a:lnTo>
-                  <a:lnTo>
-                    <a:pt x="2793278" y="194148"/>
-                  </a:lnTo>
-                  <a:lnTo>
-                    <a:pt x="2721655" y="221743"/>
-                  </a:lnTo>
-                  <a:lnTo>
-                    <a:pt x="2650033" y="248132"/>
-                  </a:lnTo>
-                  <a:lnTo>
-                    <a:pt x="2578410" y="273370"/>
-                  </a:lnTo>
-                  <a:lnTo>
-                    <a:pt x="2506788" y="297504"/>
-                  </a:lnTo>
-                  <a:lnTo>
-                    <a:pt x="2435165" y="320585"/>
-                  </a:lnTo>
-                  <a:lnTo>
-                    <a:pt x="2363543" y="342657"/>
-                  </a:lnTo>
-                  <a:lnTo>
-                    <a:pt x="2291920" y="363766"/>
-                  </a:lnTo>
-                  <a:lnTo>
-                    <a:pt x="2220298" y="383952"/>
-                  </a:lnTo>
-                  <a:lnTo>
-                    <a:pt x="2148675" y="403257"/>
-                  </a:lnTo>
-                  <a:lnTo>
-                    <a:pt x="2077053" y="421718"/>
-                  </a:lnTo>
-                  <a:lnTo>
-                    <a:pt x="2005430" y="439373"/>
-                  </a:lnTo>
-                  <a:lnTo>
-                    <a:pt x="1933808" y="456257"/>
-                  </a:lnTo>
-                  <a:lnTo>
-                    <a:pt x="1862185" y="472403"/>
-                  </a:lnTo>
-                  <a:lnTo>
-                    <a:pt x="1790563" y="487845"/>
-                  </a:lnTo>
-                  <a:lnTo>
-                    <a:pt x="1718940" y="502611"/>
-                  </a:lnTo>
-                  <a:lnTo>
-                    <a:pt x="1647318" y="516733"/>
-                  </a:lnTo>
-                  <a:lnTo>
-                    <a:pt x="1575695" y="530238"/>
-                  </a:lnTo>
-                  <a:lnTo>
-                    <a:pt x="1504073" y="543153"/>
-                  </a:lnTo>
-                  <a:lnTo>
-                    <a:pt x="1432450" y="555504"/>
-                  </a:lnTo>
-                  <a:lnTo>
-                    <a:pt x="1360827" y="567315"/>
-                  </a:lnTo>
-                  <a:lnTo>
-                    <a:pt x="1289205" y="578611"/>
-                  </a:lnTo>
-                  <a:lnTo>
-                    <a:pt x="1217582" y="589413"/>
-                  </a:lnTo>
-                  <a:lnTo>
-                    <a:pt x="1145960" y="599743"/>
-                  </a:lnTo>
-                  <a:lnTo>
-                    <a:pt x="1074337" y="609622"/>
-                  </a:lnTo>
-                  <a:lnTo>
-                    <a:pt x="1002715" y="619070"/>
-                  </a:lnTo>
-                  <a:lnTo>
-                    <a:pt x="931092" y="628105"/>
-                  </a:lnTo>
-                  <a:lnTo>
-                    <a:pt x="859470" y="636745"/>
-                  </a:lnTo>
-                  <a:lnTo>
-                    <a:pt x="787847" y="645008"/>
-                  </a:lnTo>
-                  <a:lnTo>
-                    <a:pt x="716225" y="652910"/>
-                  </a:lnTo>
-                  <a:lnTo>
-                    <a:pt x="644602" y="660467"/>
-                  </a:lnTo>
-                  <a:lnTo>
-                    <a:pt x="572980" y="667693"/>
-                  </a:lnTo>
-                  <a:lnTo>
-                    <a:pt x="501357" y="674604"/>
-                  </a:lnTo>
-                  <a:lnTo>
-                    <a:pt x="429735" y="681214"/>
-                  </a:lnTo>
-                  <a:lnTo>
-                    <a:pt x="358112" y="687534"/>
-                  </a:lnTo>
-                  <a:lnTo>
-                    <a:pt x="286490" y="693579"/>
-                  </a:lnTo>
-                  <a:lnTo>
-                    <a:pt x="214867" y="699359"/>
-                  </a:lnTo>
-                  <a:lnTo>
-                    <a:pt x="143245" y="704887"/>
-                  </a:lnTo>
-                  <a:lnTo>
-                    <a:pt x="71622" y="710173"/>
-                  </a:lnTo>
-                  <a:lnTo>
-                    <a:pt x="0" y="715229"/>
+                    <a:pt x="3151391" y="35366"/>
+                  </a:lnTo>
+                  <a:lnTo>
+                    <a:pt x="3079768" y="69198"/>
+                  </a:lnTo>
+                  <a:lnTo>
+                    <a:pt x="3008146" y="101561"/>
+                  </a:lnTo>
+                  <a:lnTo>
+                    <a:pt x="2936523" y="132520"/>
+                  </a:lnTo>
+                  <a:lnTo>
+                    <a:pt x="2864901" y="162135"/>
+                  </a:lnTo>
+                  <a:lnTo>
+                    <a:pt x="2793278" y="190464"/>
+                  </a:lnTo>
+                  <a:lnTo>
+                    <a:pt x="2721655" y="217564"/>
+                  </a:lnTo>
+                  <a:lnTo>
+                    <a:pt x="2650033" y="243488"/>
+                  </a:lnTo>
+                  <a:lnTo>
+                    <a:pt x="2578410" y="268287"/>
+                  </a:lnTo>
+                  <a:lnTo>
+                    <a:pt x="2506788" y="292009"/>
+                  </a:lnTo>
+                  <a:lnTo>
+                    <a:pt x="2435165" y="314702"/>
+                  </a:lnTo>
+                  <a:lnTo>
+                    <a:pt x="2363543" y="336410"/>
+                  </a:lnTo>
+                  <a:lnTo>
+                    <a:pt x="2291920" y="357176"/>
+                  </a:lnTo>
+                  <a:lnTo>
+                    <a:pt x="2220298" y="377040"/>
+                  </a:lnTo>
+                  <a:lnTo>
+                    <a:pt x="2148675" y="396042"/>
+                  </a:lnTo>
+                  <a:lnTo>
+                    <a:pt x="2077053" y="414220"/>
+                  </a:lnTo>
+                  <a:lnTo>
+                    <a:pt x="2005430" y="431609"/>
+                  </a:lnTo>
+                  <a:lnTo>
+                    <a:pt x="1933808" y="448242"/>
+                  </a:lnTo>
+                  <a:lnTo>
+                    <a:pt x="1862185" y="464154"/>
+                  </a:lnTo>
+                  <a:lnTo>
+                    <a:pt x="1790563" y="479376"/>
+                  </a:lnTo>
+                  <a:lnTo>
+                    <a:pt x="1718940" y="493936"/>
+                  </a:lnTo>
+                  <a:lnTo>
+                    <a:pt x="1647318" y="507865"/>
+                  </a:lnTo>
+                  <a:lnTo>
+                    <a:pt x="1575695" y="521189"/>
+                  </a:lnTo>
+                  <a:lnTo>
+                    <a:pt x="1504073" y="533935"/>
+                  </a:lnTo>
+                  <a:lnTo>
+                    <a:pt x="1432450" y="546128"/>
+                  </a:lnTo>
+                  <a:lnTo>
+                    <a:pt x="1360827" y="557791"/>
+                  </a:lnTo>
+                  <a:lnTo>
+                    <a:pt x="1289205" y="568949"/>
+                  </a:lnTo>
+                  <a:lnTo>
+                    <a:pt x="1217582" y="579622"/>
+                  </a:lnTo>
+                  <a:lnTo>
+                    <a:pt x="1145960" y="589831"/>
+                  </a:lnTo>
+                  <a:lnTo>
+                    <a:pt x="1074337" y="599598"/>
+                  </a:lnTo>
+                  <a:lnTo>
+                    <a:pt x="1002715" y="608941"/>
+                  </a:lnTo>
+                  <a:lnTo>
+                    <a:pt x="931092" y="617878"/>
+                  </a:lnTo>
+                  <a:lnTo>
+                    <a:pt x="859470" y="626428"/>
+                  </a:lnTo>
+                  <a:lnTo>
+                    <a:pt x="787847" y="634606"/>
+                  </a:lnTo>
+                  <a:lnTo>
+                    <a:pt x="716225" y="642429"/>
+                  </a:lnTo>
+                  <a:lnTo>
+                    <a:pt x="644602" y="649913"/>
+                  </a:lnTo>
+                  <a:lnTo>
+                    <a:pt x="572980" y="657072"/>
+                  </a:lnTo>
+                  <a:lnTo>
+                    <a:pt x="501357" y="663920"/>
+                  </a:lnTo>
+                  <a:lnTo>
+                    <a:pt x="429735" y="670471"/>
+                  </a:lnTo>
+                  <a:lnTo>
+                    <a:pt x="358112" y="676738"/>
+                  </a:lnTo>
+                  <a:lnTo>
+                    <a:pt x="286490" y="682733"/>
+                  </a:lnTo>
+                  <a:lnTo>
+                    <a:pt x="214867" y="688467"/>
+                  </a:lnTo>
+                  <a:lnTo>
+                    <a:pt x="143245" y="693953"/>
+                  </a:lnTo>
+                  <a:lnTo>
+                    <a:pt x="71622" y="699201"/>
+                  </a:lnTo>
+                  <a:lnTo>
+                    <a:pt x="0" y="704220"/>
                   </a:lnTo>
                 </a:path>
               </a:pathLst>
@@ -4100,309 +4100,309 @@
           </p:nvSpPr>
           <p:spPr>
             <a:xfrm>
-              <a:off x="1172049" y="4640776"/>
-              <a:ext cx="7090630" cy="153421"/>
+              <a:off x="1172049" y="4653340"/>
+              <a:ext cx="7090630" cy="132686"/>
             </a:xfrm>
             <a:custGeom>
               <a:avLst/>
               <a:pathLst>
-                <a:path w="7090630" h="153421">
+                <a:path w="7090630" h="132686">
                   <a:moveTo>
-                    <a:pt x="0" y="153421"/>
+                    <a:pt x="0" y="132686"/>
                   </a:moveTo>
                   <a:lnTo>
-                    <a:pt x="71622" y="152008"/>
-                  </a:lnTo>
-                  <a:lnTo>
-                    <a:pt x="143245" y="150592"/>
-                  </a:lnTo>
-                  <a:lnTo>
-                    <a:pt x="214867" y="149173"/>
-                  </a:lnTo>
-                  <a:lnTo>
-                    <a:pt x="286490" y="147752"/>
-                  </a:lnTo>
-                  <a:lnTo>
-                    <a:pt x="358112" y="146328"/>
-                  </a:lnTo>
-                  <a:lnTo>
-                    <a:pt x="429735" y="144901"/>
-                  </a:lnTo>
-                  <a:lnTo>
-                    <a:pt x="501357" y="143472"/>
-                  </a:lnTo>
-                  <a:lnTo>
-                    <a:pt x="572980" y="142040"/>
-                  </a:lnTo>
-                  <a:lnTo>
-                    <a:pt x="644602" y="140606"/>
-                  </a:lnTo>
-                  <a:lnTo>
-                    <a:pt x="716225" y="139169"/>
-                  </a:lnTo>
-                  <a:lnTo>
-                    <a:pt x="787847" y="137729"/>
-                  </a:lnTo>
-                  <a:lnTo>
-                    <a:pt x="859470" y="136286"/>
-                  </a:lnTo>
-                  <a:lnTo>
-                    <a:pt x="931092" y="134841"/>
-                  </a:lnTo>
-                  <a:lnTo>
-                    <a:pt x="1002715" y="133394"/>
-                  </a:lnTo>
-                  <a:lnTo>
-                    <a:pt x="1074337" y="131943"/>
-                  </a:lnTo>
-                  <a:lnTo>
-                    <a:pt x="1145960" y="130490"/>
-                  </a:lnTo>
-                  <a:lnTo>
-                    <a:pt x="1217582" y="129034"/>
-                  </a:lnTo>
-                  <a:lnTo>
-                    <a:pt x="1289205" y="127575"/>
-                  </a:lnTo>
-                  <a:lnTo>
-                    <a:pt x="1360827" y="126114"/>
-                  </a:lnTo>
-                  <a:lnTo>
-                    <a:pt x="1432450" y="124650"/>
-                  </a:lnTo>
-                  <a:lnTo>
-                    <a:pt x="1504073" y="123184"/>
-                  </a:lnTo>
-                  <a:lnTo>
-                    <a:pt x="1575695" y="121714"/>
-                  </a:lnTo>
-                  <a:lnTo>
-                    <a:pt x="1647318" y="120242"/>
-                  </a:lnTo>
-                  <a:lnTo>
-                    <a:pt x="1718940" y="118767"/>
-                  </a:lnTo>
-                  <a:lnTo>
-                    <a:pt x="1790563" y="117290"/>
-                  </a:lnTo>
-                  <a:lnTo>
-                    <a:pt x="1862185" y="115809"/>
-                  </a:lnTo>
-                  <a:lnTo>
-                    <a:pt x="1933808" y="114326"/>
-                  </a:lnTo>
-                  <a:lnTo>
-                    <a:pt x="2005430" y="112840"/>
-                  </a:lnTo>
-                  <a:lnTo>
-                    <a:pt x="2077053" y="111352"/>
-                  </a:lnTo>
-                  <a:lnTo>
-                    <a:pt x="2148675" y="109860"/>
-                  </a:lnTo>
-                  <a:lnTo>
-                    <a:pt x="2220298" y="108366"/>
-                  </a:lnTo>
-                  <a:lnTo>
-                    <a:pt x="2291920" y="106870"/>
-                  </a:lnTo>
-                  <a:lnTo>
-                    <a:pt x="2363543" y="105370"/>
-                  </a:lnTo>
-                  <a:lnTo>
-                    <a:pt x="2435165" y="103868"/>
-                  </a:lnTo>
-                  <a:lnTo>
-                    <a:pt x="2506788" y="102362"/>
-                  </a:lnTo>
-                  <a:lnTo>
-                    <a:pt x="2578410" y="100854"/>
-                  </a:lnTo>
-                  <a:lnTo>
-                    <a:pt x="2650033" y="99344"/>
-                  </a:lnTo>
-                  <a:lnTo>
-                    <a:pt x="2721655" y="97830"/>
-                  </a:lnTo>
-                  <a:lnTo>
-                    <a:pt x="2793278" y="96314"/>
-                  </a:lnTo>
-                  <a:lnTo>
-                    <a:pt x="2864901" y="94795"/>
-                  </a:lnTo>
-                  <a:lnTo>
-                    <a:pt x="2936523" y="93273"/>
-                  </a:lnTo>
-                  <a:lnTo>
-                    <a:pt x="3008146" y="91748"/>
-                  </a:lnTo>
-                  <a:lnTo>
-                    <a:pt x="3079768" y="90220"/>
-                  </a:lnTo>
-                  <a:lnTo>
-                    <a:pt x="3151391" y="88690"/>
-                  </a:lnTo>
-                  <a:lnTo>
-                    <a:pt x="3223013" y="87156"/>
-                  </a:lnTo>
-                  <a:lnTo>
-                    <a:pt x="3294636" y="85620"/>
-                  </a:lnTo>
-                  <a:lnTo>
-                    <a:pt x="3366258" y="84081"/>
-                  </a:lnTo>
-                  <a:lnTo>
-                    <a:pt x="3437881" y="82539"/>
-                  </a:lnTo>
-                  <a:lnTo>
-                    <a:pt x="3509503" y="80995"/>
-                  </a:lnTo>
-                  <a:lnTo>
-                    <a:pt x="3581126" y="79447"/>
-                  </a:lnTo>
-                  <a:lnTo>
-                    <a:pt x="3652748" y="77897"/>
-                  </a:lnTo>
-                  <a:lnTo>
-                    <a:pt x="3724371" y="76343"/>
-                  </a:lnTo>
-                  <a:lnTo>
-                    <a:pt x="3795993" y="74787"/>
-                  </a:lnTo>
-                  <a:lnTo>
-                    <a:pt x="3867616" y="73228"/>
-                  </a:lnTo>
-                  <a:lnTo>
-                    <a:pt x="3939238" y="71666"/>
-                  </a:lnTo>
-                  <a:lnTo>
-                    <a:pt x="4010861" y="70102"/>
-                  </a:lnTo>
-                  <a:lnTo>
-                    <a:pt x="4082483" y="68534"/>
-                  </a:lnTo>
-                  <a:lnTo>
-                    <a:pt x="4154106" y="66963"/>
-                  </a:lnTo>
-                  <a:lnTo>
-                    <a:pt x="4225729" y="65390"/>
-                  </a:lnTo>
-                  <a:lnTo>
-                    <a:pt x="4297351" y="63813"/>
-                  </a:lnTo>
-                  <a:lnTo>
-                    <a:pt x="4368974" y="62234"/>
-                  </a:lnTo>
-                  <a:lnTo>
-                    <a:pt x="4440596" y="60651"/>
-                  </a:lnTo>
-                  <a:lnTo>
-                    <a:pt x="4512219" y="59066"/>
-                  </a:lnTo>
-                  <a:lnTo>
-                    <a:pt x="4583841" y="57478"/>
-                  </a:lnTo>
-                  <a:lnTo>
-                    <a:pt x="4655464" y="55887"/>
-                  </a:lnTo>
-                  <a:lnTo>
-                    <a:pt x="4727086" y="54293"/>
-                  </a:lnTo>
-                  <a:lnTo>
-                    <a:pt x="4798709" y="52696"/>
-                  </a:lnTo>
-                  <a:lnTo>
-                    <a:pt x="4870331" y="51096"/>
-                  </a:lnTo>
-                  <a:lnTo>
-                    <a:pt x="4941954" y="49493"/>
-                  </a:lnTo>
-                  <a:lnTo>
-                    <a:pt x="5013576" y="47887"/>
-                  </a:lnTo>
-                  <a:lnTo>
-                    <a:pt x="5085199" y="46278"/>
-                  </a:lnTo>
-                  <a:lnTo>
-                    <a:pt x="5156821" y="44666"/>
-                  </a:lnTo>
-                  <a:lnTo>
-                    <a:pt x="5228444" y="43052"/>
-                  </a:lnTo>
-                  <a:lnTo>
-                    <a:pt x="5300066" y="41434"/>
-                  </a:lnTo>
-                  <a:lnTo>
-                    <a:pt x="5371689" y="39813"/>
-                  </a:lnTo>
-                  <a:lnTo>
-                    <a:pt x="5443311" y="38189"/>
-                  </a:lnTo>
-                  <a:lnTo>
-                    <a:pt x="5514934" y="36562"/>
-                  </a:lnTo>
-                  <a:lnTo>
-                    <a:pt x="5586557" y="34932"/>
-                  </a:lnTo>
-                  <a:lnTo>
-                    <a:pt x="5658179" y="33300"/>
-                  </a:lnTo>
-                  <a:lnTo>
-                    <a:pt x="5729802" y="31664"/>
-                  </a:lnTo>
-                  <a:lnTo>
-                    <a:pt x="5801424" y="30025"/>
-                  </a:lnTo>
-                  <a:lnTo>
-                    <a:pt x="5873047" y="28383"/>
-                  </a:lnTo>
-                  <a:lnTo>
-                    <a:pt x="5944669" y="26738"/>
-                  </a:lnTo>
-                  <a:lnTo>
-                    <a:pt x="6016292" y="25090"/>
-                  </a:lnTo>
-                  <a:lnTo>
-                    <a:pt x="6087914" y="23439"/>
-                  </a:lnTo>
-                  <a:lnTo>
-                    <a:pt x="6159537" y="21784"/>
-                  </a:lnTo>
-                  <a:lnTo>
-                    <a:pt x="6231159" y="20127"/>
-                  </a:lnTo>
-                  <a:lnTo>
-                    <a:pt x="6302782" y="18467"/>
-                  </a:lnTo>
-                  <a:lnTo>
-                    <a:pt x="6374404" y="16804"/>
-                  </a:lnTo>
-                  <a:lnTo>
-                    <a:pt x="6446027" y="15137"/>
-                  </a:lnTo>
-                  <a:lnTo>
-                    <a:pt x="6517649" y="13468"/>
-                  </a:lnTo>
-                  <a:lnTo>
-                    <a:pt x="6589272" y="11795"/>
-                  </a:lnTo>
-                  <a:lnTo>
-                    <a:pt x="6660894" y="10119"/>
-                  </a:lnTo>
-                  <a:lnTo>
-                    <a:pt x="6732517" y="8440"/>
-                  </a:lnTo>
-                  <a:lnTo>
-                    <a:pt x="6804139" y="6758"/>
-                  </a:lnTo>
-                  <a:lnTo>
-                    <a:pt x="6875762" y="5073"/>
-                  </a:lnTo>
-                  <a:lnTo>
-                    <a:pt x="6947385" y="3385"/>
-                  </a:lnTo>
-                  <a:lnTo>
-                    <a:pt x="7019007" y="1694"/>
+                    <a:pt x="71622" y="131449"/>
+                  </a:lnTo>
+                  <a:lnTo>
+                    <a:pt x="143245" y="130209"/>
+                  </a:lnTo>
+                  <a:lnTo>
+                    <a:pt x="214867" y="128967"/>
+                  </a:lnTo>
+                  <a:lnTo>
+                    <a:pt x="286490" y="127724"/>
+                  </a:lnTo>
+                  <a:lnTo>
+                    <a:pt x="358112" y="126478"/>
+                  </a:lnTo>
+                  <a:lnTo>
+                    <a:pt x="429735" y="125230"/>
+                  </a:lnTo>
+                  <a:lnTo>
+                    <a:pt x="501357" y="123981"/>
+                  </a:lnTo>
+                  <a:lnTo>
+                    <a:pt x="572980" y="122729"/>
+                  </a:lnTo>
+                  <a:lnTo>
+                    <a:pt x="644602" y="121475"/>
+                  </a:lnTo>
+                  <a:lnTo>
+                    <a:pt x="716225" y="120220"/>
+                  </a:lnTo>
+                  <a:lnTo>
+                    <a:pt x="787847" y="118962"/>
+                  </a:lnTo>
+                  <a:lnTo>
+                    <a:pt x="859470" y="117702"/>
+                  </a:lnTo>
+                  <a:lnTo>
+                    <a:pt x="931092" y="116441"/>
+                  </a:lnTo>
+                  <a:lnTo>
+                    <a:pt x="1002715" y="115177"/>
+                  </a:lnTo>
+                  <a:lnTo>
+                    <a:pt x="1074337" y="113911"/>
+                  </a:lnTo>
+                  <a:lnTo>
+                    <a:pt x="1145960" y="112643"/>
+                  </a:lnTo>
+                  <a:lnTo>
+                    <a:pt x="1217582" y="111373"/>
+                  </a:lnTo>
+                  <a:lnTo>
+                    <a:pt x="1289205" y="110101"/>
+                  </a:lnTo>
+                  <a:lnTo>
+                    <a:pt x="1360827" y="108828"/>
+                  </a:lnTo>
+                  <a:lnTo>
+                    <a:pt x="1432450" y="107552"/>
+                  </a:lnTo>
+                  <a:lnTo>
+                    <a:pt x="1504073" y="106274"/>
+                  </a:lnTo>
+                  <a:lnTo>
+                    <a:pt x="1575695" y="104993"/>
+                  </a:lnTo>
+                  <a:lnTo>
+                    <a:pt x="1647318" y="103711"/>
+                  </a:lnTo>
+                  <a:lnTo>
+                    <a:pt x="1718940" y="102427"/>
+                  </a:lnTo>
+                  <a:lnTo>
+                    <a:pt x="1790563" y="101141"/>
+                  </a:lnTo>
+                  <a:lnTo>
+                    <a:pt x="1862185" y="99853"/>
+                  </a:lnTo>
+                  <a:lnTo>
+                    <a:pt x="1933808" y="98562"/>
+                  </a:lnTo>
+                  <a:lnTo>
+                    <a:pt x="2005430" y="97270"/>
+                  </a:lnTo>
+                  <a:lnTo>
+                    <a:pt x="2077053" y="95975"/>
+                  </a:lnTo>
+                  <a:lnTo>
+                    <a:pt x="2148675" y="94679"/>
+                  </a:lnTo>
+                  <a:lnTo>
+                    <a:pt x="2220298" y="93380"/>
+                  </a:lnTo>
+                  <a:lnTo>
+                    <a:pt x="2291920" y="92079"/>
+                  </a:lnTo>
+                  <a:lnTo>
+                    <a:pt x="2363543" y="90776"/>
+                  </a:lnTo>
+                  <a:lnTo>
+                    <a:pt x="2435165" y="89471"/>
+                  </a:lnTo>
+                  <a:lnTo>
+                    <a:pt x="2506788" y="88164"/>
+                  </a:lnTo>
+                  <a:lnTo>
+                    <a:pt x="2578410" y="86855"/>
+                  </a:lnTo>
+                  <a:lnTo>
+                    <a:pt x="2650033" y="85544"/>
+                  </a:lnTo>
+                  <a:lnTo>
+                    <a:pt x="2721655" y="84231"/>
+                  </a:lnTo>
+                  <a:lnTo>
+                    <a:pt x="2793278" y="82915"/>
+                  </a:lnTo>
+                  <a:lnTo>
+                    <a:pt x="2864901" y="81597"/>
+                  </a:lnTo>
+                  <a:lnTo>
+                    <a:pt x="2936523" y="80278"/>
+                  </a:lnTo>
+                  <a:lnTo>
+                    <a:pt x="3008146" y="78956"/>
+                  </a:lnTo>
+                  <a:lnTo>
+                    <a:pt x="3079768" y="77632"/>
+                  </a:lnTo>
+                  <a:lnTo>
+                    <a:pt x="3151391" y="76306"/>
+                  </a:lnTo>
+                  <a:lnTo>
+                    <a:pt x="3223013" y="74978"/>
+                  </a:lnTo>
+                  <a:lnTo>
+                    <a:pt x="3294636" y="73648"/>
+                  </a:lnTo>
+                  <a:lnTo>
+                    <a:pt x="3366258" y="72315"/>
+                  </a:lnTo>
+                  <a:lnTo>
+                    <a:pt x="3437881" y="70981"/>
+                  </a:lnTo>
+                  <a:lnTo>
+                    <a:pt x="3509503" y="69644"/>
+                  </a:lnTo>
+                  <a:lnTo>
+                    <a:pt x="3581126" y="68305"/>
+                  </a:lnTo>
+                  <a:lnTo>
+                    <a:pt x="3652748" y="66964"/>
+                  </a:lnTo>
+                  <a:lnTo>
+                    <a:pt x="3724371" y="65621"/>
+                  </a:lnTo>
+                  <a:lnTo>
+                    <a:pt x="3795993" y="64275"/>
+                  </a:lnTo>
+                  <a:lnTo>
+                    <a:pt x="3867616" y="62928"/>
+                  </a:lnTo>
+                  <a:lnTo>
+                    <a:pt x="3939238" y="61578"/>
+                  </a:lnTo>
+                  <a:lnTo>
+                    <a:pt x="4010861" y="60226"/>
+                  </a:lnTo>
+                  <a:lnTo>
+                    <a:pt x="4082483" y="58873"/>
+                  </a:lnTo>
+                  <a:lnTo>
+                    <a:pt x="4154106" y="57516"/>
+                  </a:lnTo>
+                  <a:lnTo>
+                    <a:pt x="4225729" y="56158"/>
+                  </a:lnTo>
+                  <a:lnTo>
+                    <a:pt x="4297351" y="54798"/>
+                  </a:lnTo>
+                  <a:lnTo>
+                    <a:pt x="4368974" y="53435"/>
+                  </a:lnTo>
+                  <a:lnTo>
+                    <a:pt x="4440596" y="52070"/>
+                  </a:lnTo>
+                  <a:lnTo>
+                    <a:pt x="4512219" y="50703"/>
+                  </a:lnTo>
+                  <a:lnTo>
+                    <a:pt x="4583841" y="49334"/>
+                  </a:lnTo>
+                  <a:lnTo>
+                    <a:pt x="4655464" y="47962"/>
+                  </a:lnTo>
+                  <a:lnTo>
+                    <a:pt x="4727086" y="46589"/>
+                  </a:lnTo>
+                  <a:lnTo>
+                    <a:pt x="4798709" y="45213"/>
+                  </a:lnTo>
+                  <a:lnTo>
+                    <a:pt x="4870331" y="43835"/>
+                  </a:lnTo>
+                  <a:lnTo>
+                    <a:pt x="4941954" y="42454"/>
+                  </a:lnTo>
+                  <a:lnTo>
+                    <a:pt x="5013576" y="41072"/>
+                  </a:lnTo>
+                  <a:lnTo>
+                    <a:pt x="5085199" y="39687"/>
+                  </a:lnTo>
+                  <a:lnTo>
+                    <a:pt x="5156821" y="38300"/>
+                  </a:lnTo>
+                  <a:lnTo>
+                    <a:pt x="5228444" y="36911"/>
+                  </a:lnTo>
+                  <a:lnTo>
+                    <a:pt x="5300066" y="35520"/>
+                  </a:lnTo>
+                  <a:lnTo>
+                    <a:pt x="5371689" y="34126"/>
+                  </a:lnTo>
+                  <a:lnTo>
+                    <a:pt x="5443311" y="32730"/>
+                  </a:lnTo>
+                  <a:lnTo>
+                    <a:pt x="5514934" y="31332"/>
+                  </a:lnTo>
+                  <a:lnTo>
+                    <a:pt x="5586557" y="29932"/>
+                  </a:lnTo>
+                  <a:lnTo>
+                    <a:pt x="5658179" y="28529"/>
+                  </a:lnTo>
+                  <a:lnTo>
+                    <a:pt x="5729802" y="27124"/>
+                  </a:lnTo>
+                  <a:lnTo>
+                    <a:pt x="5801424" y="25717"/>
+                  </a:lnTo>
+                  <a:lnTo>
+                    <a:pt x="5873047" y="24308"/>
+                  </a:lnTo>
+                  <a:lnTo>
+                    <a:pt x="5944669" y="22896"/>
+                  </a:lnTo>
+                  <a:lnTo>
+                    <a:pt x="6016292" y="21482"/>
+                  </a:lnTo>
+                  <a:lnTo>
+                    <a:pt x="6087914" y="20066"/>
+                  </a:lnTo>
+                  <a:lnTo>
+                    <a:pt x="6159537" y="18648"/>
+                  </a:lnTo>
+                  <a:lnTo>
+                    <a:pt x="6231159" y="17227"/>
+                  </a:lnTo>
+                  <a:lnTo>
+                    <a:pt x="6302782" y="15804"/>
+                  </a:lnTo>
+                  <a:lnTo>
+                    <a:pt x="6374404" y="14379"/>
+                  </a:lnTo>
+                  <a:lnTo>
+                    <a:pt x="6446027" y="12951"/>
+                  </a:lnTo>
+                  <a:lnTo>
+                    <a:pt x="6517649" y="11521"/>
+                  </a:lnTo>
+                  <a:lnTo>
+                    <a:pt x="6589272" y="10089"/>
+                  </a:lnTo>
+                  <a:lnTo>
+                    <a:pt x="6660894" y="8655"/>
+                  </a:lnTo>
+                  <a:lnTo>
+                    <a:pt x="6732517" y="7218"/>
+                  </a:lnTo>
+                  <a:lnTo>
+                    <a:pt x="6804139" y="5779"/>
+                  </a:lnTo>
+                  <a:lnTo>
+                    <a:pt x="6875762" y="4337"/>
+                  </a:lnTo>
+                  <a:lnTo>
+                    <a:pt x="6947385" y="2894"/>
+                  </a:lnTo>
+                  <a:lnTo>
+                    <a:pt x="7019007" y="1448"/>
                   </a:lnTo>
                   <a:lnTo>
                     <a:pt x="7090630" y="0"/>
@@ -4477,7 +4477,7 @@
           </p:nvSpPr>
           <p:spPr>
             <a:xfrm>
-              <a:off x="4401933" y="2073503"/>
+              <a:off x="4423736" y="2073503"/>
               <a:ext cx="0" cy="3649639"/>
             </a:xfrm>
             <a:custGeom>
@@ -4520,7 +4520,7 @@
           </p:nvSpPr>
           <p:spPr>
             <a:xfrm>
-              <a:off x="3507589" y="2073503"/>
+              <a:off x="3470882" y="2073503"/>
               <a:ext cx="0" cy="3649639"/>
             </a:xfrm>
             <a:custGeom>
@@ -4563,7 +4563,7 @@
           </p:nvSpPr>
           <p:spPr>
             <a:xfrm>
-              <a:off x="5433405" y="2073503"/>
+              <a:off x="5437283" y="2073503"/>
               <a:ext cx="0" cy="3649639"/>
             </a:xfrm>
             <a:custGeom>
@@ -4836,7 +4836,7 @@
           </p:nvSpPr>
           <p:spPr>
             <a:xfrm>
-              <a:off x="842324" y="5785772"/>
+              <a:off x="843419" y="5785772"/>
               <a:ext cx="161574" cy="80101"/>
             </a:xfrm>
             <a:prstGeom prst="rect">
@@ -4882,7 +4882,7 @@
           </p:nvSpPr>
           <p:spPr>
             <a:xfrm>
-              <a:off x="2941414" y="5785772"/>
+              <a:off x="2938545" y="5785772"/>
               <a:ext cx="161574" cy="80101"/>
             </a:xfrm>
             <a:prstGeom prst="rect">
@@ -4928,7 +4928,7 @@
           </p:nvSpPr>
           <p:spPr>
             <a:xfrm>
-              <a:off x="5090202" y="5785772"/>
+              <a:off x="5083370" y="5785772"/>
               <a:ext cx="62179" cy="80101"/>
             </a:xfrm>
             <a:prstGeom prst="rect">
@@ -4974,7 +4974,7 @@
           </p:nvSpPr>
           <p:spPr>
             <a:xfrm>
-              <a:off x="7158203" y="5785772"/>
+              <a:off x="7147407" y="5785772"/>
               <a:ext cx="124358" cy="80101"/>
             </a:xfrm>
             <a:prstGeom prst="rect">
@@ -5145,7 +5145,7 @@
                   <a:latin typeface="Helvetica"/>
                   <a:cs typeface="Helvetica"/>
                 </a:rPr>
-                <a:t>subHR per 10 % decline: 0.98 (0.59-1.62), p_Bonf = 1.000 (n = 6)  |  per IQR decline (Δ = 22.9 %): 0.95 (0.30-3.01)  |  IQR: [-19.2, 3.7] %</a:t>
+                <a:t>subHR per 10 % decline: 0.98 (0.59-1.62), p_Bonf = 1.000 (n = 6)  |  per IQR decline (Δ = 23.5 %): 0.96 (0.30-3.10)  |  IQR: [-19.6, 3.9] %</a:t>
               </a:r>
             </a:p>
           </p:txBody>
